--- a/public/fun/pack/pptx/review/보장점검양식_27_부부점검_한가위달.pptx
+++ b/public/fun/pack/pptx/review/보장점검양식_27_부부점검_한가위달.pptx
@@ -3286,6 +3286,14 @@
 <file path=ppt/slides/slide1.xml><?xml version="1.0" encoding="utf-8"?>
 <p:sld xmlns:a="http://schemas.openxmlformats.org/drawingml/2006/main" xmlns:p="http://schemas.openxmlformats.org/presentationml/2006/main" xmlns:r="http://schemas.openxmlformats.org/officeDocument/2006/relationships">
   <p:cSld>
+    <p:bg>
+      <p:bgPr>
+        <a:solidFill>
+          <a:srgbClr val="FBF6EC"/>
+        </a:solidFill>
+        <a:effectLst/>
+      </p:bgPr>
+    </p:bg>
     <p:spTree>
       <p:nvGrpSpPr>
         <p:cNvPr id="1" name=""/>
@@ -3293,30 +3301,105 @@
         <p:nvPr/>
       </p:nvGrpSpPr>
       <p:grpSpPr/>
-      <p:pic>
-        <p:nvPicPr>
-          <p:cNvPr id="3" name="표지 그림" descr="review-27.jpg"/>
-          <p:cNvPicPr>
-            <a:picLocks noChangeAspect="1"/>
-          </p:cNvPicPr>
+      <p:sp>
+        <p:nvSpPr>
+          <p:cNvPr id="3" name="장식"/>
+          <p:cNvSpPr/>
           <p:nvPr/>
-        </p:nvPicPr>
-        <p:blipFill>
-          <a:blip r:embed="rId2"/>
-          <a:stretch>
-            <a:fillRect/>
-          </a:stretch>
-        </p:blipFill>
-        <p:spPr>
-          <a:xfrm>
-            <a:off x="0" y="0"/>
-            <a:ext cx="12191695" cy="6858000"/>
+        </p:nvSpPr>
+        <p:spPr>
+          <a:xfrm>
+            <a:off x="1463003" y="685800"/>
+            <a:ext cx="3169840" cy="5486400"/>
+          </a:xfrm>
+          <a:prstGeom prst="round2SameRect">
+            <a:avLst>
+              <a:gd name="adj1" fmla="val 50000"/>
+              <a:gd name="adj2" fmla="val 0"/>
+            </a:avLst>
+          </a:prstGeom>
+          <a:solidFill>
+            <a:srgbClr val="D8B879"/>
+          </a:solidFill>
+          <a:ln>
+            <a:noFill/>
+          </a:ln>
+        </p:spPr>
+        <p:txBody>
+          <a:bodyPr rtlCol="0" anchor="ctr"/>
+          <a:lstStyle/>
+          <a:p>
+            <a:pPr algn="ctr"/>
+          </a:p>
+        </p:txBody>
+      </p:sp>
+      <p:sp>
+        <p:nvSpPr>
+          <p:cNvPr id="4" name="장식"/>
+          <p:cNvSpPr/>
+          <p:nvPr/>
+        </p:nvSpPr>
+        <p:spPr>
+          <a:xfrm>
+            <a:off x="4358505" y="4251960"/>
+            <a:ext cx="1005840" cy="1005840"/>
+          </a:xfrm>
+          <a:prstGeom prst="ellipse">
+            <a:avLst/>
+          </a:prstGeom>
+          <a:solidFill>
+            <a:srgbClr val="EBD6AD"/>
+          </a:solidFill>
+          <a:ln>
+            <a:noFill/>
+          </a:ln>
+        </p:spPr>
+        <p:txBody>
+          <a:bodyPr rtlCol="0" anchor="ctr"/>
+          <a:lstStyle/>
+          <a:p>
+            <a:pPr algn="ctr"/>
+          </a:p>
+        </p:txBody>
+      </p:sp>
+      <p:sp>
+        <p:nvSpPr>
+          <p:cNvPr id="5" name="라벨"/>
+          <p:cNvSpPr txBox="1"/>
+          <p:nvPr/>
+        </p:nvSpPr>
+        <p:spPr>
+          <a:xfrm>
+            <a:off x="6827349" y="2148840"/>
+            <a:ext cx="4632844" cy="274320"/>
           </a:xfrm>
           <a:prstGeom prst="rect">
             <a:avLst/>
           </a:prstGeom>
-        </p:spPr>
-      </p:pic>
+          <a:noFill/>
+        </p:spPr>
+        <p:txBody>
+          <a:bodyPr wrap="square" lIns="54864" rIns="54864" tIns="27432" bIns="27432" anchor="t">
+            <a:noAutofit/>
+          </a:bodyPr>
+          <a:lstStyle/>
+          <a:p>
+            <a:pPr algn="l">
+              <a:lnSpc>
+                <a:spcPct val="115000"/>
+              </a:lnSpc>
+            </a:pPr>
+            <a:r>
+              <a:rPr sz="1000" b="1" i="0" spc="250">
+                <a:solidFill>
+                  <a:srgbClr val="26231F"/>
+                </a:solidFill>
+              </a:rPr>
+              <a:t>INSURANCE CHECK</a:t>
+            </a:r>
+          </a:p>
+        </p:txBody>
+      </p:sp>
       <p:sp>
         <p:nvSpPr>
           <p:cNvPr id="2" name="Title 1"/>
@@ -3329,8 +3412,8 @@
         </p:nvSpPr>
         <p:spPr>
           <a:xfrm>
-            <a:off x="853418" y="2057400"/>
-            <a:ext cx="6095847" cy="1554480"/>
+            <a:off x="6827349" y="2606040"/>
+            <a:ext cx="4632844" cy="1188720"/>
           </a:xfrm>
         </p:spPr>
         <p:txBody>
@@ -3347,7 +3430,7 @@
             <a:r>
               <a:rPr sz="3600" b="1" i="0">
                 <a:solidFill>
-                  <a:srgbClr val="715214"/>
+                  <a:srgbClr val="26231F"/>
                 </a:solidFill>
               </a:rPr>
               <a:t>우리 보험 점검 시간</a:t>
@@ -3357,14 +3440,14 @@
       </p:sp>
       <p:sp>
         <p:nvSpPr>
-          <p:cNvPr id="4" name="한 줄 문구"/>
+          <p:cNvPr id="6" name="한 줄 문구"/>
           <p:cNvSpPr txBox="1"/>
           <p:nvPr/>
         </p:nvSpPr>
         <p:spPr>
           <a:xfrm>
-            <a:off x="853418" y="3749039"/>
-            <a:ext cx="6095847" cy="822960"/>
+            <a:off x="6827349" y="3886200"/>
+            <a:ext cx="4632844" cy="822960"/>
           </a:xfrm>
           <a:prstGeom prst="rect">
             <a:avLst/>
@@ -3383,9 +3466,9 @@
               </a:lnSpc>
             </a:pPr>
             <a:r>
-              <a:rPr sz="1700" b="0" i="1">
+              <a:rPr sz="1700" b="0" i="0">
                 <a:solidFill>
-                  <a:srgbClr val="715214"/>
+                  <a:srgbClr val="26231F"/>
                 </a:solidFill>
               </a:rPr>
               <a:t>수익자 이름이 맞는지 확인합니다</a:t>
@@ -3395,14 +3478,14 @@
       </p:sp>
       <p:sp>
         <p:nvSpPr>
-          <p:cNvPr id="5" name="안내 문구"/>
+          <p:cNvPr id="7" name="안내 문구"/>
           <p:cNvSpPr txBox="1"/>
           <p:nvPr/>
         </p:nvSpPr>
         <p:spPr>
           <a:xfrm>
-            <a:off x="853418" y="4617720"/>
-            <a:ext cx="6095847" cy="914400"/>
+            <a:off x="6827349" y="4754880"/>
+            <a:ext cx="4632844" cy="914400"/>
           </a:xfrm>
           <a:prstGeom prst="rect">
             <a:avLst/>
@@ -3423,10 +3506,10 @@
             <a:r>
               <a:rPr sz="1400" b="0" i="0">
                 <a:solidFill>
-                  <a:srgbClr val="666666"/>
+                  <a:srgbClr val="26231F"/>
                 </a:solidFill>
               </a:rPr>
-              <a:t>부부 점검 · 2027. 00. 00</a:t>
+              <a:t>부부 점검 · 날짜 입력</a:t>
             </a:r>
           </a:p>
           <a:p>
@@ -3438,7 +3521,7 @@
             <a:r>
               <a:rPr sz="1400" b="0" i="0">
                 <a:solidFill>
-                  <a:srgbClr val="666666"/>
+                  <a:srgbClr val="26231F"/>
                 </a:solidFill>
               </a:rPr>
               <a:t>가입 내용을 정리하고 함께 확인하는 양식</a:t>
@@ -3460,7 +3543,7 @@
     <p:bg>
       <p:bgPr>
         <a:solidFill>
-          <a:srgbClr val="F7E8C9"/>
+          <a:srgbClr val="FFFFFF"/>
         </a:solidFill>
         <a:effectLst/>
       </p:bgPr>
@@ -3480,20 +3563,84 @@
         </p:nvSpPr>
         <p:spPr>
           <a:xfrm>
-            <a:off x="274320" y="274320"/>
-            <a:ext cx="11643055" cy="6309360"/>
+            <a:off x="640080" y="566928"/>
+            <a:ext cx="10911535" cy="10972"/>
           </a:xfrm>
           <a:prstGeom prst="rect">
             <a:avLst/>
           </a:prstGeom>
           <a:solidFill>
-            <a:srgbClr val="FFFFFF"/>
+            <a:srgbClr val="26231F"/>
           </a:solidFill>
-          <a:ln w="25400">
-            <a:solidFill>
-              <a:srgbClr val="C79123"/>
-            </a:solidFill>
-            <a:prstDash val="dash"/>
+          <a:ln>
+            <a:noFill/>
+          </a:ln>
+        </p:spPr>
+        <p:txBody>
+          <a:bodyPr rtlCol="0" anchor="ctr"/>
+          <a:lstStyle/>
+          <a:p>
+            <a:pPr algn="ctr"/>
+          </a:p>
+        </p:txBody>
+      </p:sp>
+      <p:sp>
+        <p:nvSpPr>
+          <p:cNvPr id="4" name="상단 라벨"/>
+          <p:cNvSpPr txBox="1"/>
+          <p:nvPr/>
+        </p:nvSpPr>
+        <p:spPr>
+          <a:xfrm>
+            <a:off x="640080" y="237744"/>
+            <a:ext cx="5486400" cy="274320"/>
+          </a:xfrm>
+          <a:prstGeom prst="rect">
+            <a:avLst/>
+          </a:prstGeom>
+          <a:noFill/>
+        </p:spPr>
+        <p:txBody>
+          <a:bodyPr wrap="square" lIns="54864" rIns="54864" tIns="27432" bIns="27432" anchor="ctr">
+            <a:noAutofit/>
+          </a:bodyPr>
+          <a:lstStyle/>
+          <a:p>
+            <a:pPr algn="l">
+              <a:lnSpc>
+                <a:spcPct val="115000"/>
+              </a:lnSpc>
+            </a:pPr>
+            <a:r>
+              <a:rPr sz="900" b="1" i="0" spc="250">
+                <a:solidFill>
+                  <a:srgbClr val="26231F"/>
+                </a:solidFill>
+              </a:rPr>
+              <a:t>INSURANCE CHECK</a:t>
+            </a:r>
+          </a:p>
+        </p:txBody>
+      </p:sp>
+      <p:sp>
+        <p:nvSpPr>
+          <p:cNvPr id="5" name="포인트"/>
+          <p:cNvSpPr/>
+          <p:nvPr/>
+        </p:nvSpPr>
+        <p:spPr>
+          <a:xfrm>
+            <a:off x="11204143" y="246888"/>
+            <a:ext cx="237744" cy="237744"/>
+          </a:xfrm>
+          <a:prstGeom prst="donut">
+            <a:avLst/>
+          </a:prstGeom>
+          <a:solidFill>
+            <a:srgbClr val="D8B879"/>
+          </a:solidFill>
+          <a:ln>
+            <a:noFill/>
           </a:ln>
         </p:spPr>
         <p:txBody>
@@ -3516,8 +3663,8 @@
         </p:nvSpPr>
         <p:spPr>
           <a:xfrm>
-            <a:off x="777240" y="548640"/>
-            <a:ext cx="9357055" cy="822960"/>
+            <a:off x="640080" y="731520"/>
+            <a:ext cx="10911535" cy="822960"/>
           </a:xfrm>
         </p:spPr>
         <p:txBody>
@@ -3534,7 +3681,7 @@
             <a:r>
               <a:rPr sz="3000" b="1" i="0">
                 <a:solidFill>
-                  <a:srgbClr val="715214"/>
+                  <a:srgbClr val="26231F"/>
                 </a:solidFill>
               </a:rPr>
               <a:t>점검 대상 현황</a:t>
@@ -3544,15 +3691,15 @@
       </p:sp>
       <p:graphicFrame>
         <p:nvGraphicFramePr>
-          <p:cNvPr id="4" name="표"/>
+          <p:cNvPr id="6" name="표"/>
           <p:cNvGraphicFramePr>
             <a:graphicFrameLocks noGrp="1"/>
           </p:cNvGraphicFramePr>
           <p:nvPr/>
         </p:nvGraphicFramePr>
         <p:xfrm>
-          <a:off x="777240" y="1554480"/>
-          <a:ext cx="10637214" cy="3657600"/>
+          <a:off x="640080" y="1783080"/>
+          <a:ext cx="10911534" cy="3657600"/>
         </p:xfrm>
         <a:graphic>
           <a:graphicData uri="http://schemas.openxmlformats.org/drawingml/2006/table">
@@ -3561,9 +3708,9 @@
                 <a:tableStyleId>{5C22544A-7EE6-4342-B048-85BDC9FD1C3A}</a:tableStyleId>
               </a:tblPr>
               <a:tblGrid>
-                <a:gridCol w="3545738"/>
-                <a:gridCol w="3545738"/>
-                <a:gridCol w="3545738"/>
+                <a:gridCol w="3637178"/>
+                <a:gridCol w="3637178"/>
+                <a:gridCol w="3637178"/>
               </a:tblGrid>
               <a:tr h="731520">
                 <a:tc>
@@ -3575,7 +3722,7 @@
                       <a:r>
                         <a:rPr sz="1600" b="1">
                           <a:solidFill>
-                            <a:srgbClr val="FFFFFF"/>
+                            <a:srgbClr val="26231F"/>
                           </a:solidFill>
                         </a:rPr>
                         <a:t>구분</a:t>
@@ -3585,30 +3732,30 @@
                   <a:tcPr anchor="ctr" marL="73152" marR="73152">
                     <a:lnL w="9525" cap="flat" cmpd="sng" algn="ctr">
                       <a:solidFill>
-                        <a:srgbClr val="C79123"/>
+                        <a:srgbClr val="D8B879"/>
                       </a:solidFill>
                       <a:prstDash val="solid"/>
                     </a:lnL>
                     <a:lnR w="9525" cap="flat" cmpd="sng" algn="ctr">
                       <a:solidFill>
-                        <a:srgbClr val="C79123"/>
+                        <a:srgbClr val="D8B879"/>
                       </a:solidFill>
                       <a:prstDash val="solid"/>
                     </a:lnR>
                     <a:lnT w="9525" cap="flat" cmpd="sng" algn="ctr">
                       <a:solidFill>
-                        <a:srgbClr val="C79123"/>
+                        <a:srgbClr val="D8B879"/>
                       </a:solidFill>
                       <a:prstDash val="solid"/>
                     </a:lnT>
                     <a:lnB w="9525" cap="flat" cmpd="sng" algn="ctr">
                       <a:solidFill>
-                        <a:srgbClr val="C79123"/>
+                        <a:srgbClr val="D8B879"/>
                       </a:solidFill>
                       <a:prstDash val="solid"/>
                     </a:lnB>
                     <a:solidFill>
-                      <a:srgbClr val="C79123"/>
+                      <a:srgbClr val="D8B879"/>
                     </a:solidFill>
                   </a:tcPr>
                 </a:tc>
@@ -3621,7 +3768,7 @@
                       <a:r>
                         <a:rPr sz="1600" b="1">
                           <a:solidFill>
-                            <a:srgbClr val="FFFFFF"/>
+                            <a:srgbClr val="26231F"/>
                           </a:solidFill>
                         </a:rPr>
                         <a:t>남편</a:t>
@@ -3631,30 +3778,30 @@
                   <a:tcPr anchor="ctr" marL="73152" marR="73152">
                     <a:lnL w="9525" cap="flat" cmpd="sng" algn="ctr">
                       <a:solidFill>
-                        <a:srgbClr val="C79123"/>
+                        <a:srgbClr val="D8B879"/>
                       </a:solidFill>
                       <a:prstDash val="solid"/>
                     </a:lnL>
                     <a:lnR w="9525" cap="flat" cmpd="sng" algn="ctr">
                       <a:solidFill>
-                        <a:srgbClr val="C79123"/>
+                        <a:srgbClr val="D8B879"/>
                       </a:solidFill>
                       <a:prstDash val="solid"/>
                     </a:lnR>
                     <a:lnT w="9525" cap="flat" cmpd="sng" algn="ctr">
                       <a:solidFill>
-                        <a:srgbClr val="C79123"/>
+                        <a:srgbClr val="D8B879"/>
                       </a:solidFill>
                       <a:prstDash val="solid"/>
                     </a:lnT>
                     <a:lnB w="9525" cap="flat" cmpd="sng" algn="ctr">
                       <a:solidFill>
-                        <a:srgbClr val="C79123"/>
+                        <a:srgbClr val="D8B879"/>
                       </a:solidFill>
                       <a:prstDash val="solid"/>
                     </a:lnB>
                     <a:solidFill>
-                      <a:srgbClr val="C79123"/>
+                      <a:srgbClr val="D8B879"/>
                     </a:solidFill>
                   </a:tcPr>
                 </a:tc>
@@ -3667,7 +3814,7 @@
                       <a:r>
                         <a:rPr sz="1600" b="1">
                           <a:solidFill>
-                            <a:srgbClr val="FFFFFF"/>
+                            <a:srgbClr val="26231F"/>
                           </a:solidFill>
                         </a:rPr>
                         <a:t>아내</a:t>
@@ -3677,30 +3824,30 @@
                   <a:tcPr anchor="ctr" marL="73152" marR="73152">
                     <a:lnL w="9525" cap="flat" cmpd="sng" algn="ctr">
                       <a:solidFill>
-                        <a:srgbClr val="C79123"/>
+                        <a:srgbClr val="D8B879"/>
                       </a:solidFill>
                       <a:prstDash val="solid"/>
                     </a:lnL>
                     <a:lnR w="9525" cap="flat" cmpd="sng" algn="ctr">
                       <a:solidFill>
-                        <a:srgbClr val="C79123"/>
+                        <a:srgbClr val="D8B879"/>
                       </a:solidFill>
                       <a:prstDash val="solid"/>
                     </a:lnR>
                     <a:lnT w="9525" cap="flat" cmpd="sng" algn="ctr">
                       <a:solidFill>
-                        <a:srgbClr val="C79123"/>
+                        <a:srgbClr val="D8B879"/>
                       </a:solidFill>
                       <a:prstDash val="solid"/>
                     </a:lnT>
                     <a:lnB w="9525" cap="flat" cmpd="sng" algn="ctr">
                       <a:solidFill>
-                        <a:srgbClr val="C79123"/>
+                        <a:srgbClr val="D8B879"/>
                       </a:solidFill>
                       <a:prstDash val="solid"/>
                     </a:lnB>
                     <a:solidFill>
-                      <a:srgbClr val="C79123"/>
+                      <a:srgbClr val="D8B879"/>
                     </a:solidFill>
                   </a:tcPr>
                 </a:tc>
@@ -3715,7 +3862,7 @@
                       <a:r>
                         <a:rPr sz="1600" b="1">
                           <a:solidFill>
-                            <a:srgbClr val="715214"/>
+                            <a:srgbClr val="493E27"/>
                           </a:solidFill>
                         </a:rPr>
                         <a:t>이름</a:t>
@@ -3725,30 +3872,30 @@
                   <a:tcPr anchor="ctr" marL="73152" marR="73152">
                     <a:lnL w="9525" cap="flat" cmpd="sng" algn="ctr">
                       <a:solidFill>
-                        <a:srgbClr val="F7E8C9"/>
+                        <a:srgbClr val="F6EBD5"/>
                       </a:solidFill>
                       <a:prstDash val="solid"/>
                     </a:lnL>
                     <a:lnR w="9525" cap="flat" cmpd="sng" algn="ctr">
                       <a:solidFill>
-                        <a:srgbClr val="F7E8C9"/>
+                        <a:srgbClr val="F6EBD5"/>
                       </a:solidFill>
                       <a:prstDash val="solid"/>
                     </a:lnR>
                     <a:lnT w="9525" cap="flat" cmpd="sng" algn="ctr">
                       <a:solidFill>
-                        <a:srgbClr val="F7E8C9"/>
+                        <a:srgbClr val="F6EBD5"/>
                       </a:solidFill>
                       <a:prstDash val="solid"/>
                     </a:lnT>
                     <a:lnB w="9525" cap="flat" cmpd="sng" algn="ctr">
                       <a:solidFill>
-                        <a:srgbClr val="F7E8C9"/>
+                        <a:srgbClr val="F6EBD5"/>
                       </a:solidFill>
                       <a:prstDash val="solid"/>
                     </a:lnB>
                     <a:solidFill>
-                      <a:srgbClr val="F7E8C9"/>
+                      <a:srgbClr val="F6EBD5"/>
                     </a:solidFill>
                   </a:tcPr>
                 </a:tc>
@@ -3761,7 +3908,7 @@
                       <a:r>
                         <a:rPr sz="1600" b="0">
                           <a:solidFill>
-                            <a:srgbClr val="2B2B2B"/>
+                            <a:srgbClr val="26231F"/>
                           </a:solidFill>
                         </a:rPr>
                         <a:t/>
@@ -3771,25 +3918,25 @@
                   <a:tcPr anchor="ctr" marL="73152" marR="73152">
                     <a:lnL w="9525" cap="flat" cmpd="sng" algn="ctr">
                       <a:solidFill>
-                        <a:srgbClr val="F7E8C9"/>
+                        <a:srgbClr val="F6EBD5"/>
                       </a:solidFill>
                       <a:prstDash val="solid"/>
                     </a:lnL>
                     <a:lnR w="9525" cap="flat" cmpd="sng" algn="ctr">
                       <a:solidFill>
-                        <a:srgbClr val="F7E8C9"/>
+                        <a:srgbClr val="F6EBD5"/>
                       </a:solidFill>
                       <a:prstDash val="solid"/>
                     </a:lnR>
                     <a:lnT w="9525" cap="flat" cmpd="sng" algn="ctr">
                       <a:solidFill>
-                        <a:srgbClr val="F7E8C9"/>
+                        <a:srgbClr val="F6EBD5"/>
                       </a:solidFill>
                       <a:prstDash val="solid"/>
                     </a:lnT>
                     <a:lnB w="9525" cap="flat" cmpd="sng" algn="ctr">
                       <a:solidFill>
-                        <a:srgbClr val="F7E8C9"/>
+                        <a:srgbClr val="F6EBD5"/>
                       </a:solidFill>
                       <a:prstDash val="solid"/>
                     </a:lnB>
@@ -3807,7 +3954,7 @@
                       <a:r>
                         <a:rPr sz="1600" b="0">
                           <a:solidFill>
-                            <a:srgbClr val="2B2B2B"/>
+                            <a:srgbClr val="26231F"/>
                           </a:solidFill>
                         </a:rPr>
                         <a:t/>
@@ -3817,25 +3964,25 @@
                   <a:tcPr anchor="ctr" marL="73152" marR="73152">
                     <a:lnL w="9525" cap="flat" cmpd="sng" algn="ctr">
                       <a:solidFill>
-                        <a:srgbClr val="F7E8C9"/>
+                        <a:srgbClr val="F6EBD5"/>
                       </a:solidFill>
                       <a:prstDash val="solid"/>
                     </a:lnL>
                     <a:lnR w="9525" cap="flat" cmpd="sng" algn="ctr">
                       <a:solidFill>
-                        <a:srgbClr val="F7E8C9"/>
+                        <a:srgbClr val="F6EBD5"/>
                       </a:solidFill>
                       <a:prstDash val="solid"/>
                     </a:lnR>
                     <a:lnT w="9525" cap="flat" cmpd="sng" algn="ctr">
                       <a:solidFill>
-                        <a:srgbClr val="F7E8C9"/>
+                        <a:srgbClr val="F6EBD5"/>
                       </a:solidFill>
                       <a:prstDash val="solid"/>
                     </a:lnT>
                     <a:lnB w="9525" cap="flat" cmpd="sng" algn="ctr">
                       <a:solidFill>
-                        <a:srgbClr val="F7E8C9"/>
+                        <a:srgbClr val="F6EBD5"/>
                       </a:solidFill>
                       <a:prstDash val="solid"/>
                     </a:lnB>
@@ -3855,7 +4002,7 @@
                       <a:r>
                         <a:rPr sz="1600" b="1">
                           <a:solidFill>
-                            <a:srgbClr val="715214"/>
+                            <a:srgbClr val="493E27"/>
                           </a:solidFill>
                         </a:rPr>
                         <a:t>나이</a:t>
@@ -3865,30 +4012,30 @@
                   <a:tcPr anchor="ctr" marL="73152" marR="73152">
                     <a:lnL w="9525" cap="flat" cmpd="sng" algn="ctr">
                       <a:solidFill>
-                        <a:srgbClr val="F7E8C9"/>
+                        <a:srgbClr val="F6EBD5"/>
                       </a:solidFill>
                       <a:prstDash val="solid"/>
                     </a:lnL>
                     <a:lnR w="9525" cap="flat" cmpd="sng" algn="ctr">
                       <a:solidFill>
-                        <a:srgbClr val="F7E8C9"/>
+                        <a:srgbClr val="F6EBD5"/>
                       </a:solidFill>
                       <a:prstDash val="solid"/>
                     </a:lnR>
                     <a:lnT w="9525" cap="flat" cmpd="sng" algn="ctr">
                       <a:solidFill>
-                        <a:srgbClr val="F7E8C9"/>
+                        <a:srgbClr val="F6EBD5"/>
                       </a:solidFill>
                       <a:prstDash val="solid"/>
                     </a:lnT>
                     <a:lnB w="9525" cap="flat" cmpd="sng" algn="ctr">
                       <a:solidFill>
-                        <a:srgbClr val="F7E8C9"/>
+                        <a:srgbClr val="F6EBD5"/>
                       </a:solidFill>
                       <a:prstDash val="solid"/>
                     </a:lnB>
                     <a:solidFill>
-                      <a:srgbClr val="F7E8C9"/>
+                      <a:srgbClr val="F6EBD5"/>
                     </a:solidFill>
                   </a:tcPr>
                 </a:tc>
@@ -3901,7 +4048,7 @@
                       <a:r>
                         <a:rPr sz="1600" b="0">
                           <a:solidFill>
-                            <a:srgbClr val="2B2B2B"/>
+                            <a:srgbClr val="26231F"/>
                           </a:solidFill>
                         </a:rPr>
                         <a:t/>
@@ -3911,30 +4058,30 @@
                   <a:tcPr anchor="ctr" marL="73152" marR="73152">
                     <a:lnL w="9525" cap="flat" cmpd="sng" algn="ctr">
                       <a:solidFill>
-                        <a:srgbClr val="F7E8C9"/>
+                        <a:srgbClr val="F6EBD5"/>
                       </a:solidFill>
                       <a:prstDash val="solid"/>
                     </a:lnL>
                     <a:lnR w="9525" cap="flat" cmpd="sng" algn="ctr">
                       <a:solidFill>
-                        <a:srgbClr val="F7E8C9"/>
+                        <a:srgbClr val="F6EBD5"/>
                       </a:solidFill>
                       <a:prstDash val="solid"/>
                     </a:lnR>
                     <a:lnT w="9525" cap="flat" cmpd="sng" algn="ctr">
                       <a:solidFill>
-                        <a:srgbClr val="F7E8C9"/>
+                        <a:srgbClr val="F6EBD5"/>
                       </a:solidFill>
                       <a:prstDash val="solid"/>
                     </a:lnT>
                     <a:lnB w="9525" cap="flat" cmpd="sng" algn="ctr">
                       <a:solidFill>
-                        <a:srgbClr val="F7E8C9"/>
+                        <a:srgbClr val="F6EBD5"/>
                       </a:solidFill>
                       <a:prstDash val="solid"/>
                     </a:lnB>
                     <a:solidFill>
-                      <a:srgbClr val="FCF7EE"/>
+                      <a:srgbClr val="FBF6EC"/>
                     </a:solidFill>
                   </a:tcPr>
                 </a:tc>
@@ -3947,7 +4094,7 @@
                       <a:r>
                         <a:rPr sz="1600" b="0">
                           <a:solidFill>
-                            <a:srgbClr val="2B2B2B"/>
+                            <a:srgbClr val="26231F"/>
                           </a:solidFill>
                         </a:rPr>
                         <a:t/>
@@ -3957,30 +4104,30 @@
                   <a:tcPr anchor="ctr" marL="73152" marR="73152">
                     <a:lnL w="9525" cap="flat" cmpd="sng" algn="ctr">
                       <a:solidFill>
-                        <a:srgbClr val="F7E8C9"/>
+                        <a:srgbClr val="F6EBD5"/>
                       </a:solidFill>
                       <a:prstDash val="solid"/>
                     </a:lnL>
                     <a:lnR w="9525" cap="flat" cmpd="sng" algn="ctr">
                       <a:solidFill>
-                        <a:srgbClr val="F7E8C9"/>
+                        <a:srgbClr val="F6EBD5"/>
                       </a:solidFill>
                       <a:prstDash val="solid"/>
                     </a:lnR>
                     <a:lnT w="9525" cap="flat" cmpd="sng" algn="ctr">
                       <a:solidFill>
-                        <a:srgbClr val="F7E8C9"/>
+                        <a:srgbClr val="F6EBD5"/>
                       </a:solidFill>
                       <a:prstDash val="solid"/>
                     </a:lnT>
                     <a:lnB w="9525" cap="flat" cmpd="sng" algn="ctr">
                       <a:solidFill>
-                        <a:srgbClr val="F7E8C9"/>
+                        <a:srgbClr val="F6EBD5"/>
                       </a:solidFill>
                       <a:prstDash val="solid"/>
                     </a:lnB>
                     <a:solidFill>
-                      <a:srgbClr val="FCF7EE"/>
+                      <a:srgbClr val="FBF6EC"/>
                     </a:solidFill>
                   </a:tcPr>
                 </a:tc>
@@ -3995,7 +4142,7 @@
                       <a:r>
                         <a:rPr sz="1600" b="1">
                           <a:solidFill>
-                            <a:srgbClr val="715214"/>
+                            <a:srgbClr val="493E27"/>
                           </a:solidFill>
                         </a:rPr>
                         <a:t>직업</a:t>
@@ -4005,30 +4152,30 @@
                   <a:tcPr anchor="ctr" marL="73152" marR="73152">
                     <a:lnL w="9525" cap="flat" cmpd="sng" algn="ctr">
                       <a:solidFill>
-                        <a:srgbClr val="F7E8C9"/>
+                        <a:srgbClr val="F6EBD5"/>
                       </a:solidFill>
                       <a:prstDash val="solid"/>
                     </a:lnL>
                     <a:lnR w="9525" cap="flat" cmpd="sng" algn="ctr">
                       <a:solidFill>
-                        <a:srgbClr val="F7E8C9"/>
+                        <a:srgbClr val="F6EBD5"/>
                       </a:solidFill>
                       <a:prstDash val="solid"/>
                     </a:lnR>
                     <a:lnT w="9525" cap="flat" cmpd="sng" algn="ctr">
                       <a:solidFill>
-                        <a:srgbClr val="F7E8C9"/>
+                        <a:srgbClr val="F6EBD5"/>
                       </a:solidFill>
                       <a:prstDash val="solid"/>
                     </a:lnT>
                     <a:lnB w="9525" cap="flat" cmpd="sng" algn="ctr">
                       <a:solidFill>
-                        <a:srgbClr val="F7E8C9"/>
+                        <a:srgbClr val="F6EBD5"/>
                       </a:solidFill>
                       <a:prstDash val="solid"/>
                     </a:lnB>
                     <a:solidFill>
-                      <a:srgbClr val="F7E8C9"/>
+                      <a:srgbClr val="F6EBD5"/>
                     </a:solidFill>
                   </a:tcPr>
                 </a:tc>
@@ -4041,7 +4188,7 @@
                       <a:r>
                         <a:rPr sz="1600" b="0">
                           <a:solidFill>
-                            <a:srgbClr val="2B2B2B"/>
+                            <a:srgbClr val="26231F"/>
                           </a:solidFill>
                         </a:rPr>
                         <a:t/>
@@ -4051,25 +4198,25 @@
                   <a:tcPr anchor="ctr" marL="73152" marR="73152">
                     <a:lnL w="9525" cap="flat" cmpd="sng" algn="ctr">
                       <a:solidFill>
-                        <a:srgbClr val="F7E8C9"/>
+                        <a:srgbClr val="F6EBD5"/>
                       </a:solidFill>
                       <a:prstDash val="solid"/>
                     </a:lnL>
                     <a:lnR w="9525" cap="flat" cmpd="sng" algn="ctr">
                       <a:solidFill>
-                        <a:srgbClr val="F7E8C9"/>
+                        <a:srgbClr val="F6EBD5"/>
                       </a:solidFill>
                       <a:prstDash val="solid"/>
                     </a:lnR>
                     <a:lnT w="9525" cap="flat" cmpd="sng" algn="ctr">
                       <a:solidFill>
-                        <a:srgbClr val="F7E8C9"/>
+                        <a:srgbClr val="F6EBD5"/>
                       </a:solidFill>
                       <a:prstDash val="solid"/>
                     </a:lnT>
                     <a:lnB w="9525" cap="flat" cmpd="sng" algn="ctr">
                       <a:solidFill>
-                        <a:srgbClr val="F7E8C9"/>
+                        <a:srgbClr val="F6EBD5"/>
                       </a:solidFill>
                       <a:prstDash val="solid"/>
                     </a:lnB>
@@ -4087,7 +4234,7 @@
                       <a:r>
                         <a:rPr sz="1600" b="0">
                           <a:solidFill>
-                            <a:srgbClr val="2B2B2B"/>
+                            <a:srgbClr val="26231F"/>
                           </a:solidFill>
                         </a:rPr>
                         <a:t/>
@@ -4097,25 +4244,25 @@
                   <a:tcPr anchor="ctr" marL="73152" marR="73152">
                     <a:lnL w="9525" cap="flat" cmpd="sng" algn="ctr">
                       <a:solidFill>
-                        <a:srgbClr val="F7E8C9"/>
+                        <a:srgbClr val="F6EBD5"/>
                       </a:solidFill>
                       <a:prstDash val="solid"/>
                     </a:lnL>
                     <a:lnR w="9525" cap="flat" cmpd="sng" algn="ctr">
                       <a:solidFill>
-                        <a:srgbClr val="F7E8C9"/>
+                        <a:srgbClr val="F6EBD5"/>
                       </a:solidFill>
                       <a:prstDash val="solid"/>
                     </a:lnR>
                     <a:lnT w="9525" cap="flat" cmpd="sng" algn="ctr">
                       <a:solidFill>
-                        <a:srgbClr val="F7E8C9"/>
+                        <a:srgbClr val="F6EBD5"/>
                       </a:solidFill>
                       <a:prstDash val="solid"/>
                     </a:lnT>
                     <a:lnB w="9525" cap="flat" cmpd="sng" algn="ctr">
                       <a:solidFill>
-                        <a:srgbClr val="F7E8C9"/>
+                        <a:srgbClr val="F6EBD5"/>
                       </a:solidFill>
                       <a:prstDash val="solid"/>
                     </a:lnB>
@@ -4135,7 +4282,7 @@
                       <a:r>
                         <a:rPr sz="1600" b="1">
                           <a:solidFill>
-                            <a:srgbClr val="715214"/>
+                            <a:srgbClr val="493E27"/>
                           </a:solidFill>
                         </a:rPr>
                         <a:t>건강 상태 메모</a:t>
@@ -4145,30 +4292,30 @@
                   <a:tcPr anchor="ctr" marL="73152" marR="73152">
                     <a:lnL w="9525" cap="flat" cmpd="sng" algn="ctr">
                       <a:solidFill>
-                        <a:srgbClr val="F7E8C9"/>
+                        <a:srgbClr val="F6EBD5"/>
                       </a:solidFill>
                       <a:prstDash val="solid"/>
                     </a:lnL>
                     <a:lnR w="9525" cap="flat" cmpd="sng" algn="ctr">
                       <a:solidFill>
-                        <a:srgbClr val="F7E8C9"/>
+                        <a:srgbClr val="F6EBD5"/>
                       </a:solidFill>
                       <a:prstDash val="solid"/>
                     </a:lnR>
                     <a:lnT w="9525" cap="flat" cmpd="sng" algn="ctr">
                       <a:solidFill>
-                        <a:srgbClr val="F7E8C9"/>
+                        <a:srgbClr val="F6EBD5"/>
                       </a:solidFill>
                       <a:prstDash val="solid"/>
                     </a:lnT>
                     <a:lnB w="9525" cap="flat" cmpd="sng" algn="ctr">
                       <a:solidFill>
-                        <a:srgbClr val="F7E8C9"/>
+                        <a:srgbClr val="F6EBD5"/>
                       </a:solidFill>
                       <a:prstDash val="solid"/>
                     </a:lnB>
                     <a:solidFill>
-                      <a:srgbClr val="F7E8C9"/>
+                      <a:srgbClr val="F6EBD5"/>
                     </a:solidFill>
                   </a:tcPr>
                 </a:tc>
@@ -4181,7 +4328,7 @@
                       <a:r>
                         <a:rPr sz="1600" b="0">
                           <a:solidFill>
-                            <a:srgbClr val="2B2B2B"/>
+                            <a:srgbClr val="26231F"/>
                           </a:solidFill>
                         </a:rPr>
                         <a:t/>
@@ -4191,30 +4338,30 @@
                   <a:tcPr anchor="ctr" marL="73152" marR="73152">
                     <a:lnL w="9525" cap="flat" cmpd="sng" algn="ctr">
                       <a:solidFill>
-                        <a:srgbClr val="F7E8C9"/>
+                        <a:srgbClr val="F6EBD5"/>
                       </a:solidFill>
                       <a:prstDash val="solid"/>
                     </a:lnL>
                     <a:lnR w="9525" cap="flat" cmpd="sng" algn="ctr">
                       <a:solidFill>
-                        <a:srgbClr val="F7E8C9"/>
+                        <a:srgbClr val="F6EBD5"/>
                       </a:solidFill>
                       <a:prstDash val="solid"/>
                     </a:lnR>
                     <a:lnT w="9525" cap="flat" cmpd="sng" algn="ctr">
                       <a:solidFill>
-                        <a:srgbClr val="F7E8C9"/>
+                        <a:srgbClr val="F6EBD5"/>
                       </a:solidFill>
                       <a:prstDash val="solid"/>
                     </a:lnT>
                     <a:lnB w="9525" cap="flat" cmpd="sng" algn="ctr">
                       <a:solidFill>
-                        <a:srgbClr val="F7E8C9"/>
+                        <a:srgbClr val="F6EBD5"/>
                       </a:solidFill>
                       <a:prstDash val="solid"/>
                     </a:lnB>
                     <a:solidFill>
-                      <a:srgbClr val="FCF7EE"/>
+                      <a:srgbClr val="FBF6EC"/>
                     </a:solidFill>
                   </a:tcPr>
                 </a:tc>
@@ -4227,7 +4374,7 @@
                       <a:r>
                         <a:rPr sz="1600" b="0">
                           <a:solidFill>
-                            <a:srgbClr val="2B2B2B"/>
+                            <a:srgbClr val="26231F"/>
                           </a:solidFill>
                         </a:rPr>
                         <a:t/>
@@ -4237,30 +4384,30 @@
                   <a:tcPr anchor="ctr" marL="73152" marR="73152">
                     <a:lnL w="9525" cap="flat" cmpd="sng" algn="ctr">
                       <a:solidFill>
-                        <a:srgbClr val="F7E8C9"/>
+                        <a:srgbClr val="F6EBD5"/>
                       </a:solidFill>
                       <a:prstDash val="solid"/>
                     </a:lnL>
                     <a:lnR w="9525" cap="flat" cmpd="sng" algn="ctr">
                       <a:solidFill>
-                        <a:srgbClr val="F7E8C9"/>
+                        <a:srgbClr val="F6EBD5"/>
                       </a:solidFill>
                       <a:prstDash val="solid"/>
                     </a:lnR>
                     <a:lnT w="9525" cap="flat" cmpd="sng" algn="ctr">
                       <a:solidFill>
-                        <a:srgbClr val="F7E8C9"/>
+                        <a:srgbClr val="F6EBD5"/>
                       </a:solidFill>
                       <a:prstDash val="solid"/>
                     </a:lnT>
                     <a:lnB w="9525" cap="flat" cmpd="sng" algn="ctr">
                       <a:solidFill>
-                        <a:srgbClr val="F7E8C9"/>
+                        <a:srgbClr val="F6EBD5"/>
                       </a:solidFill>
                       <a:prstDash val="solid"/>
                     </a:lnB>
                     <a:solidFill>
-                      <a:srgbClr val="FCF7EE"/>
+                      <a:srgbClr val="FBF6EC"/>
                     </a:solidFill>
                   </a:tcPr>
                 </a:tc>
@@ -4283,7 +4430,7 @@
     <p:bg>
       <p:bgPr>
         <a:solidFill>
-          <a:srgbClr val="F7E8C9"/>
+          <a:srgbClr val="FFFFFF"/>
         </a:solidFill>
         <a:effectLst/>
       </p:bgPr>
@@ -4303,20 +4450,84 @@
         </p:nvSpPr>
         <p:spPr>
           <a:xfrm>
-            <a:off x="274320" y="274320"/>
-            <a:ext cx="11643055" cy="6309360"/>
+            <a:off x="640080" y="566928"/>
+            <a:ext cx="10911535" cy="10972"/>
           </a:xfrm>
           <a:prstGeom prst="rect">
             <a:avLst/>
           </a:prstGeom>
           <a:solidFill>
-            <a:srgbClr val="FFFFFF"/>
+            <a:srgbClr val="26231F"/>
           </a:solidFill>
-          <a:ln w="25400">
-            <a:solidFill>
-              <a:srgbClr val="C79123"/>
-            </a:solidFill>
-            <a:prstDash val="dash"/>
+          <a:ln>
+            <a:noFill/>
+          </a:ln>
+        </p:spPr>
+        <p:txBody>
+          <a:bodyPr rtlCol="0" anchor="ctr"/>
+          <a:lstStyle/>
+          <a:p>
+            <a:pPr algn="ctr"/>
+          </a:p>
+        </p:txBody>
+      </p:sp>
+      <p:sp>
+        <p:nvSpPr>
+          <p:cNvPr id="4" name="상단 라벨"/>
+          <p:cNvSpPr txBox="1"/>
+          <p:nvPr/>
+        </p:nvSpPr>
+        <p:spPr>
+          <a:xfrm>
+            <a:off x="640080" y="237744"/>
+            <a:ext cx="5486400" cy="274320"/>
+          </a:xfrm>
+          <a:prstGeom prst="rect">
+            <a:avLst/>
+          </a:prstGeom>
+          <a:noFill/>
+        </p:spPr>
+        <p:txBody>
+          <a:bodyPr wrap="square" lIns="54864" rIns="54864" tIns="27432" bIns="27432" anchor="ctr">
+            <a:noAutofit/>
+          </a:bodyPr>
+          <a:lstStyle/>
+          <a:p>
+            <a:pPr algn="l">
+              <a:lnSpc>
+                <a:spcPct val="115000"/>
+              </a:lnSpc>
+            </a:pPr>
+            <a:r>
+              <a:rPr sz="900" b="1" i="0" spc="250">
+                <a:solidFill>
+                  <a:srgbClr val="26231F"/>
+                </a:solidFill>
+              </a:rPr>
+              <a:t>INSURANCE CHECK</a:t>
+            </a:r>
+          </a:p>
+        </p:txBody>
+      </p:sp>
+      <p:sp>
+        <p:nvSpPr>
+          <p:cNvPr id="5" name="포인트"/>
+          <p:cNvSpPr/>
+          <p:nvPr/>
+        </p:nvSpPr>
+        <p:spPr>
+          <a:xfrm>
+            <a:off x="11204143" y="246888"/>
+            <a:ext cx="237744" cy="237744"/>
+          </a:xfrm>
+          <a:prstGeom prst="donut">
+            <a:avLst/>
+          </a:prstGeom>
+          <a:solidFill>
+            <a:srgbClr val="D8B879"/>
+          </a:solidFill>
+          <a:ln>
+            <a:noFill/>
           </a:ln>
         </p:spPr>
         <p:txBody>
@@ -4339,8 +4550,8 @@
         </p:nvSpPr>
         <p:spPr>
           <a:xfrm>
-            <a:off x="777240" y="548640"/>
-            <a:ext cx="9357055" cy="822960"/>
+            <a:off x="640080" y="731520"/>
+            <a:ext cx="10911535" cy="822960"/>
           </a:xfrm>
         </p:spPr>
         <p:txBody>
@@ -4357,7 +4568,7 @@
             <a:r>
               <a:rPr sz="3000" b="1" i="0">
                 <a:solidFill>
-                  <a:srgbClr val="715214"/>
+                  <a:srgbClr val="26231F"/>
                 </a:solidFill>
               </a:rPr>
               <a:t>가입한 보험 목록</a:t>
@@ -4367,15 +4578,15 @@
       </p:sp>
       <p:graphicFrame>
         <p:nvGraphicFramePr>
-          <p:cNvPr id="4" name="표"/>
+          <p:cNvPr id="6" name="표"/>
           <p:cNvGraphicFramePr>
             <a:graphicFrameLocks noGrp="1"/>
           </p:cNvGraphicFramePr>
           <p:nvPr/>
         </p:nvGraphicFramePr>
         <p:xfrm>
-          <a:off x="777240" y="1554480"/>
-          <a:ext cx="10637215" cy="4224528"/>
+          <a:off x="640080" y="1783080"/>
+          <a:ext cx="10911535" cy="4224528"/>
         </p:xfrm>
         <a:graphic>
           <a:graphicData uri="http://schemas.openxmlformats.org/drawingml/2006/table">
@@ -4388,7 +4599,7 @@
                 <a:gridCol w="3108960"/>
                 <a:gridCol w="1828800"/>
                 <a:gridCol w="1828800"/>
-                <a:gridCol w="1858975"/>
+                <a:gridCol w="2133295"/>
               </a:tblGrid>
               <a:tr h="603504">
                 <a:tc>
@@ -4400,7 +4611,7 @@
                       <a:r>
                         <a:rPr sz="1400" b="1">
                           <a:solidFill>
-                            <a:srgbClr val="FFFFFF"/>
+                            <a:srgbClr val="26231F"/>
                           </a:solidFill>
                         </a:rPr>
                         <a:t>보험회사</a:t>
@@ -4410,30 +4621,30 @@
                   <a:tcPr anchor="ctr" marL="73152" marR="73152">
                     <a:lnL w="9525" cap="flat" cmpd="sng" algn="ctr">
                       <a:solidFill>
-                        <a:srgbClr val="C79123"/>
+                        <a:srgbClr val="D8B879"/>
                       </a:solidFill>
                       <a:prstDash val="solid"/>
                     </a:lnL>
                     <a:lnR w="9525" cap="flat" cmpd="sng" algn="ctr">
                       <a:solidFill>
-                        <a:srgbClr val="C79123"/>
+                        <a:srgbClr val="D8B879"/>
                       </a:solidFill>
                       <a:prstDash val="solid"/>
                     </a:lnR>
                     <a:lnT w="9525" cap="flat" cmpd="sng" algn="ctr">
                       <a:solidFill>
-                        <a:srgbClr val="C79123"/>
+                        <a:srgbClr val="D8B879"/>
                       </a:solidFill>
                       <a:prstDash val="solid"/>
                     </a:lnT>
                     <a:lnB w="9525" cap="flat" cmpd="sng" algn="ctr">
                       <a:solidFill>
-                        <a:srgbClr val="C79123"/>
+                        <a:srgbClr val="D8B879"/>
                       </a:solidFill>
                       <a:prstDash val="solid"/>
                     </a:lnB>
                     <a:solidFill>
-                      <a:srgbClr val="C79123"/>
+                      <a:srgbClr val="D8B879"/>
                     </a:solidFill>
                   </a:tcPr>
                 </a:tc>
@@ -4446,7 +4657,7 @@
                       <a:r>
                         <a:rPr sz="1400" b="1">
                           <a:solidFill>
-                            <a:srgbClr val="FFFFFF"/>
+                            <a:srgbClr val="26231F"/>
                           </a:solidFill>
                         </a:rPr>
                         <a:t>상품명</a:t>
@@ -4456,30 +4667,30 @@
                   <a:tcPr anchor="ctr" marL="73152" marR="73152">
                     <a:lnL w="9525" cap="flat" cmpd="sng" algn="ctr">
                       <a:solidFill>
-                        <a:srgbClr val="C79123"/>
+                        <a:srgbClr val="D8B879"/>
                       </a:solidFill>
                       <a:prstDash val="solid"/>
                     </a:lnL>
                     <a:lnR w="9525" cap="flat" cmpd="sng" algn="ctr">
                       <a:solidFill>
-                        <a:srgbClr val="C79123"/>
+                        <a:srgbClr val="D8B879"/>
                       </a:solidFill>
                       <a:prstDash val="solid"/>
                     </a:lnR>
                     <a:lnT w="9525" cap="flat" cmpd="sng" algn="ctr">
                       <a:solidFill>
-                        <a:srgbClr val="C79123"/>
+                        <a:srgbClr val="D8B879"/>
                       </a:solidFill>
                       <a:prstDash val="solid"/>
                     </a:lnT>
                     <a:lnB w="9525" cap="flat" cmpd="sng" algn="ctr">
                       <a:solidFill>
-                        <a:srgbClr val="C79123"/>
+                        <a:srgbClr val="D8B879"/>
                       </a:solidFill>
                       <a:prstDash val="solid"/>
                     </a:lnB>
                     <a:solidFill>
-                      <a:srgbClr val="C79123"/>
+                      <a:srgbClr val="D8B879"/>
                     </a:solidFill>
                   </a:tcPr>
                 </a:tc>
@@ -4492,7 +4703,7 @@
                       <a:r>
                         <a:rPr sz="1400" b="1">
                           <a:solidFill>
-                            <a:srgbClr val="FFFFFF"/>
+                            <a:srgbClr val="26231F"/>
                           </a:solidFill>
                         </a:rPr>
                         <a:t>종류</a:t>
@@ -4502,30 +4713,30 @@
                   <a:tcPr anchor="ctr" marL="73152" marR="73152">
                     <a:lnL w="9525" cap="flat" cmpd="sng" algn="ctr">
                       <a:solidFill>
-                        <a:srgbClr val="C79123"/>
+                        <a:srgbClr val="D8B879"/>
                       </a:solidFill>
                       <a:prstDash val="solid"/>
                     </a:lnL>
                     <a:lnR w="9525" cap="flat" cmpd="sng" algn="ctr">
                       <a:solidFill>
-                        <a:srgbClr val="C79123"/>
+                        <a:srgbClr val="D8B879"/>
                       </a:solidFill>
                       <a:prstDash val="solid"/>
                     </a:lnR>
                     <a:lnT w="9525" cap="flat" cmpd="sng" algn="ctr">
                       <a:solidFill>
-                        <a:srgbClr val="C79123"/>
+                        <a:srgbClr val="D8B879"/>
                       </a:solidFill>
                       <a:prstDash val="solid"/>
                     </a:lnT>
                     <a:lnB w="9525" cap="flat" cmpd="sng" algn="ctr">
                       <a:solidFill>
-                        <a:srgbClr val="C79123"/>
+                        <a:srgbClr val="D8B879"/>
                       </a:solidFill>
                       <a:prstDash val="solid"/>
                     </a:lnB>
                     <a:solidFill>
-                      <a:srgbClr val="C79123"/>
+                      <a:srgbClr val="D8B879"/>
                     </a:solidFill>
                   </a:tcPr>
                 </a:tc>
@@ -4538,7 +4749,7 @@
                       <a:r>
                         <a:rPr sz="1400" b="1">
                           <a:solidFill>
-                            <a:srgbClr val="FFFFFF"/>
+                            <a:srgbClr val="26231F"/>
                           </a:solidFill>
                         </a:rPr>
                         <a:t>만기일</a:t>
@@ -4548,30 +4759,30 @@
                   <a:tcPr anchor="ctr" marL="73152" marR="73152">
                     <a:lnL w="9525" cap="flat" cmpd="sng" algn="ctr">
                       <a:solidFill>
-                        <a:srgbClr val="C79123"/>
+                        <a:srgbClr val="D8B879"/>
                       </a:solidFill>
                       <a:prstDash val="solid"/>
                     </a:lnL>
                     <a:lnR w="9525" cap="flat" cmpd="sng" algn="ctr">
                       <a:solidFill>
-                        <a:srgbClr val="C79123"/>
+                        <a:srgbClr val="D8B879"/>
                       </a:solidFill>
                       <a:prstDash val="solid"/>
                     </a:lnR>
                     <a:lnT w="9525" cap="flat" cmpd="sng" algn="ctr">
                       <a:solidFill>
-                        <a:srgbClr val="C79123"/>
+                        <a:srgbClr val="D8B879"/>
                       </a:solidFill>
                       <a:prstDash val="solid"/>
                     </a:lnT>
                     <a:lnB w="9525" cap="flat" cmpd="sng" algn="ctr">
                       <a:solidFill>
-                        <a:srgbClr val="C79123"/>
+                        <a:srgbClr val="D8B879"/>
                       </a:solidFill>
                       <a:prstDash val="solid"/>
                     </a:lnB>
                     <a:solidFill>
-                      <a:srgbClr val="C79123"/>
+                      <a:srgbClr val="D8B879"/>
                     </a:solidFill>
                   </a:tcPr>
                 </a:tc>
@@ -4584,7 +4795,7 @@
                       <a:r>
                         <a:rPr sz="1400" b="1">
                           <a:solidFill>
-                            <a:srgbClr val="FFFFFF"/>
+                            <a:srgbClr val="26231F"/>
                           </a:solidFill>
                         </a:rPr>
                         <a:t>월 보험료</a:t>
@@ -4594,30 +4805,30 @@
                   <a:tcPr anchor="ctr" marL="73152" marR="73152">
                     <a:lnL w="9525" cap="flat" cmpd="sng" algn="ctr">
                       <a:solidFill>
-                        <a:srgbClr val="C79123"/>
+                        <a:srgbClr val="D8B879"/>
                       </a:solidFill>
                       <a:prstDash val="solid"/>
                     </a:lnL>
                     <a:lnR w="9525" cap="flat" cmpd="sng" algn="ctr">
                       <a:solidFill>
-                        <a:srgbClr val="C79123"/>
+                        <a:srgbClr val="D8B879"/>
                       </a:solidFill>
                       <a:prstDash val="solid"/>
                     </a:lnR>
                     <a:lnT w="9525" cap="flat" cmpd="sng" algn="ctr">
                       <a:solidFill>
-                        <a:srgbClr val="C79123"/>
+                        <a:srgbClr val="D8B879"/>
                       </a:solidFill>
                       <a:prstDash val="solid"/>
                     </a:lnT>
                     <a:lnB w="9525" cap="flat" cmpd="sng" algn="ctr">
                       <a:solidFill>
-                        <a:srgbClr val="C79123"/>
+                        <a:srgbClr val="D8B879"/>
                       </a:solidFill>
                       <a:prstDash val="solid"/>
                     </a:lnB>
                     <a:solidFill>
-                      <a:srgbClr val="C79123"/>
+                      <a:srgbClr val="D8B879"/>
                     </a:solidFill>
                   </a:tcPr>
                 </a:tc>
@@ -4632,7 +4843,7 @@
                       <a:r>
                         <a:rPr sz="1400" b="0">
                           <a:solidFill>
-                            <a:srgbClr val="2B2B2B"/>
+                            <a:srgbClr val="26231F"/>
                           </a:solidFill>
                         </a:rPr>
                         <a:t/>
@@ -4642,25 +4853,25 @@
                   <a:tcPr anchor="ctr" marL="73152" marR="73152">
                     <a:lnL w="9525" cap="flat" cmpd="sng" algn="ctr">
                       <a:solidFill>
-                        <a:srgbClr val="F7E8C9"/>
+                        <a:srgbClr val="F6EBD5"/>
                       </a:solidFill>
                       <a:prstDash val="solid"/>
                     </a:lnL>
                     <a:lnR w="9525" cap="flat" cmpd="sng" algn="ctr">
                       <a:solidFill>
-                        <a:srgbClr val="F7E8C9"/>
+                        <a:srgbClr val="F6EBD5"/>
                       </a:solidFill>
                       <a:prstDash val="solid"/>
                     </a:lnR>
                     <a:lnT w="9525" cap="flat" cmpd="sng" algn="ctr">
                       <a:solidFill>
-                        <a:srgbClr val="F7E8C9"/>
+                        <a:srgbClr val="F6EBD5"/>
                       </a:solidFill>
                       <a:prstDash val="solid"/>
                     </a:lnT>
                     <a:lnB w="9525" cap="flat" cmpd="sng" algn="ctr">
                       <a:solidFill>
-                        <a:srgbClr val="F7E8C9"/>
+                        <a:srgbClr val="F6EBD5"/>
                       </a:solidFill>
                       <a:prstDash val="solid"/>
                     </a:lnB>
@@ -4678,7 +4889,7 @@
                       <a:r>
                         <a:rPr sz="1400" b="0">
                           <a:solidFill>
-                            <a:srgbClr val="2B2B2B"/>
+                            <a:srgbClr val="26231F"/>
                           </a:solidFill>
                         </a:rPr>
                         <a:t/>
@@ -4688,25 +4899,25 @@
                   <a:tcPr anchor="ctr" marL="73152" marR="73152">
                     <a:lnL w="9525" cap="flat" cmpd="sng" algn="ctr">
                       <a:solidFill>
-                        <a:srgbClr val="F7E8C9"/>
+                        <a:srgbClr val="F6EBD5"/>
                       </a:solidFill>
                       <a:prstDash val="solid"/>
                     </a:lnL>
                     <a:lnR w="9525" cap="flat" cmpd="sng" algn="ctr">
                       <a:solidFill>
-                        <a:srgbClr val="F7E8C9"/>
+                        <a:srgbClr val="F6EBD5"/>
                       </a:solidFill>
                       <a:prstDash val="solid"/>
                     </a:lnR>
                     <a:lnT w="9525" cap="flat" cmpd="sng" algn="ctr">
                       <a:solidFill>
-                        <a:srgbClr val="F7E8C9"/>
+                        <a:srgbClr val="F6EBD5"/>
                       </a:solidFill>
                       <a:prstDash val="solid"/>
                     </a:lnT>
                     <a:lnB w="9525" cap="flat" cmpd="sng" algn="ctr">
                       <a:solidFill>
-                        <a:srgbClr val="F7E8C9"/>
+                        <a:srgbClr val="F6EBD5"/>
                       </a:solidFill>
                       <a:prstDash val="solid"/>
                     </a:lnB>
@@ -4724,7 +4935,7 @@
                       <a:r>
                         <a:rPr sz="1400" b="0">
                           <a:solidFill>
-                            <a:srgbClr val="2B2B2B"/>
+                            <a:srgbClr val="26231F"/>
                           </a:solidFill>
                         </a:rPr>
                         <a:t/>
@@ -4734,25 +4945,25 @@
                   <a:tcPr anchor="ctr" marL="73152" marR="73152">
                     <a:lnL w="9525" cap="flat" cmpd="sng" algn="ctr">
                       <a:solidFill>
-                        <a:srgbClr val="F7E8C9"/>
+                        <a:srgbClr val="F6EBD5"/>
                       </a:solidFill>
                       <a:prstDash val="solid"/>
                     </a:lnL>
                     <a:lnR w="9525" cap="flat" cmpd="sng" algn="ctr">
                       <a:solidFill>
-                        <a:srgbClr val="F7E8C9"/>
+                        <a:srgbClr val="F6EBD5"/>
                       </a:solidFill>
                       <a:prstDash val="solid"/>
                     </a:lnR>
                     <a:lnT w="9525" cap="flat" cmpd="sng" algn="ctr">
                       <a:solidFill>
-                        <a:srgbClr val="F7E8C9"/>
+                        <a:srgbClr val="F6EBD5"/>
                       </a:solidFill>
                       <a:prstDash val="solid"/>
                     </a:lnT>
                     <a:lnB w="9525" cap="flat" cmpd="sng" algn="ctr">
                       <a:solidFill>
-                        <a:srgbClr val="F7E8C9"/>
+                        <a:srgbClr val="F6EBD5"/>
                       </a:solidFill>
                       <a:prstDash val="solid"/>
                     </a:lnB>
@@ -4770,7 +4981,7 @@
                       <a:r>
                         <a:rPr sz="1400" b="0">
                           <a:solidFill>
-                            <a:srgbClr val="2B2B2B"/>
+                            <a:srgbClr val="26231F"/>
                           </a:solidFill>
                         </a:rPr>
                         <a:t/>
@@ -4780,25 +4991,25 @@
                   <a:tcPr anchor="ctr" marL="73152" marR="73152">
                     <a:lnL w="9525" cap="flat" cmpd="sng" algn="ctr">
                       <a:solidFill>
-                        <a:srgbClr val="F7E8C9"/>
+                        <a:srgbClr val="F6EBD5"/>
                       </a:solidFill>
                       <a:prstDash val="solid"/>
                     </a:lnL>
                     <a:lnR w="9525" cap="flat" cmpd="sng" algn="ctr">
                       <a:solidFill>
-                        <a:srgbClr val="F7E8C9"/>
+                        <a:srgbClr val="F6EBD5"/>
                       </a:solidFill>
                       <a:prstDash val="solid"/>
                     </a:lnR>
                     <a:lnT w="9525" cap="flat" cmpd="sng" algn="ctr">
                       <a:solidFill>
-                        <a:srgbClr val="F7E8C9"/>
+                        <a:srgbClr val="F6EBD5"/>
                       </a:solidFill>
                       <a:prstDash val="solid"/>
                     </a:lnT>
                     <a:lnB w="9525" cap="flat" cmpd="sng" algn="ctr">
                       <a:solidFill>
-                        <a:srgbClr val="F7E8C9"/>
+                        <a:srgbClr val="F6EBD5"/>
                       </a:solidFill>
                       <a:prstDash val="solid"/>
                     </a:lnB>
@@ -4816,7 +5027,7 @@
                       <a:r>
                         <a:rPr sz="1400" b="0">
                           <a:solidFill>
-                            <a:srgbClr val="2B2B2B"/>
+                            <a:srgbClr val="26231F"/>
                           </a:solidFill>
                         </a:rPr>
                         <a:t/>
@@ -4826,25 +5037,25 @@
                   <a:tcPr anchor="ctr" marL="73152" marR="73152">
                     <a:lnL w="9525" cap="flat" cmpd="sng" algn="ctr">
                       <a:solidFill>
-                        <a:srgbClr val="F7E8C9"/>
+                        <a:srgbClr val="F6EBD5"/>
                       </a:solidFill>
                       <a:prstDash val="solid"/>
                     </a:lnL>
                     <a:lnR w="9525" cap="flat" cmpd="sng" algn="ctr">
                       <a:solidFill>
-                        <a:srgbClr val="F7E8C9"/>
+                        <a:srgbClr val="F6EBD5"/>
                       </a:solidFill>
                       <a:prstDash val="solid"/>
                     </a:lnR>
                     <a:lnT w="9525" cap="flat" cmpd="sng" algn="ctr">
                       <a:solidFill>
-                        <a:srgbClr val="F7E8C9"/>
+                        <a:srgbClr val="F6EBD5"/>
                       </a:solidFill>
                       <a:prstDash val="solid"/>
                     </a:lnT>
                     <a:lnB w="9525" cap="flat" cmpd="sng" algn="ctr">
                       <a:solidFill>
-                        <a:srgbClr val="F7E8C9"/>
+                        <a:srgbClr val="F6EBD5"/>
                       </a:solidFill>
                       <a:prstDash val="solid"/>
                     </a:lnB>
@@ -4864,7 +5075,7 @@
                       <a:r>
                         <a:rPr sz="1400" b="0">
                           <a:solidFill>
-                            <a:srgbClr val="2B2B2B"/>
+                            <a:srgbClr val="26231F"/>
                           </a:solidFill>
                         </a:rPr>
                         <a:t/>
@@ -4874,30 +5085,30 @@
                   <a:tcPr anchor="ctr" marL="73152" marR="73152">
                     <a:lnL w="9525" cap="flat" cmpd="sng" algn="ctr">
                       <a:solidFill>
-                        <a:srgbClr val="F7E8C9"/>
+                        <a:srgbClr val="F6EBD5"/>
                       </a:solidFill>
                       <a:prstDash val="solid"/>
                     </a:lnL>
                     <a:lnR w="9525" cap="flat" cmpd="sng" algn="ctr">
                       <a:solidFill>
-                        <a:srgbClr val="F7E8C9"/>
+                        <a:srgbClr val="F6EBD5"/>
                       </a:solidFill>
                       <a:prstDash val="solid"/>
                     </a:lnR>
                     <a:lnT w="9525" cap="flat" cmpd="sng" algn="ctr">
                       <a:solidFill>
-                        <a:srgbClr val="F7E8C9"/>
+                        <a:srgbClr val="F6EBD5"/>
                       </a:solidFill>
                       <a:prstDash val="solid"/>
                     </a:lnT>
                     <a:lnB w="9525" cap="flat" cmpd="sng" algn="ctr">
                       <a:solidFill>
-                        <a:srgbClr val="F7E8C9"/>
+                        <a:srgbClr val="F6EBD5"/>
                       </a:solidFill>
                       <a:prstDash val="solid"/>
                     </a:lnB>
                     <a:solidFill>
-                      <a:srgbClr val="FCF7EE"/>
+                      <a:srgbClr val="FBF6EC"/>
                     </a:solidFill>
                   </a:tcPr>
                 </a:tc>
@@ -4910,7 +5121,7 @@
                       <a:r>
                         <a:rPr sz="1400" b="0">
                           <a:solidFill>
-                            <a:srgbClr val="2B2B2B"/>
+                            <a:srgbClr val="26231F"/>
                           </a:solidFill>
                         </a:rPr>
                         <a:t/>
@@ -4920,30 +5131,30 @@
                   <a:tcPr anchor="ctr" marL="73152" marR="73152">
                     <a:lnL w="9525" cap="flat" cmpd="sng" algn="ctr">
                       <a:solidFill>
-                        <a:srgbClr val="F7E8C9"/>
+                        <a:srgbClr val="F6EBD5"/>
                       </a:solidFill>
                       <a:prstDash val="solid"/>
                     </a:lnL>
                     <a:lnR w="9525" cap="flat" cmpd="sng" algn="ctr">
                       <a:solidFill>
-                        <a:srgbClr val="F7E8C9"/>
+                        <a:srgbClr val="F6EBD5"/>
                       </a:solidFill>
                       <a:prstDash val="solid"/>
                     </a:lnR>
                     <a:lnT w="9525" cap="flat" cmpd="sng" algn="ctr">
                       <a:solidFill>
-                        <a:srgbClr val="F7E8C9"/>
+                        <a:srgbClr val="F6EBD5"/>
                       </a:solidFill>
                       <a:prstDash val="solid"/>
                     </a:lnT>
                     <a:lnB w="9525" cap="flat" cmpd="sng" algn="ctr">
                       <a:solidFill>
-                        <a:srgbClr val="F7E8C9"/>
+                        <a:srgbClr val="F6EBD5"/>
                       </a:solidFill>
                       <a:prstDash val="solid"/>
                     </a:lnB>
                     <a:solidFill>
-                      <a:srgbClr val="FCF7EE"/>
+                      <a:srgbClr val="FBF6EC"/>
                     </a:solidFill>
                   </a:tcPr>
                 </a:tc>
@@ -4956,7 +5167,7 @@
                       <a:r>
                         <a:rPr sz="1400" b="0">
                           <a:solidFill>
-                            <a:srgbClr val="2B2B2B"/>
+                            <a:srgbClr val="26231F"/>
                           </a:solidFill>
                         </a:rPr>
                         <a:t/>
@@ -4966,30 +5177,30 @@
                   <a:tcPr anchor="ctr" marL="73152" marR="73152">
                     <a:lnL w="9525" cap="flat" cmpd="sng" algn="ctr">
                       <a:solidFill>
-                        <a:srgbClr val="F7E8C9"/>
+                        <a:srgbClr val="F6EBD5"/>
                       </a:solidFill>
                       <a:prstDash val="solid"/>
                     </a:lnL>
                     <a:lnR w="9525" cap="flat" cmpd="sng" algn="ctr">
                       <a:solidFill>
-                        <a:srgbClr val="F7E8C9"/>
+                        <a:srgbClr val="F6EBD5"/>
                       </a:solidFill>
                       <a:prstDash val="solid"/>
                     </a:lnR>
                     <a:lnT w="9525" cap="flat" cmpd="sng" algn="ctr">
                       <a:solidFill>
-                        <a:srgbClr val="F7E8C9"/>
+                        <a:srgbClr val="F6EBD5"/>
                       </a:solidFill>
                       <a:prstDash val="solid"/>
                     </a:lnT>
                     <a:lnB w="9525" cap="flat" cmpd="sng" algn="ctr">
                       <a:solidFill>
-                        <a:srgbClr val="F7E8C9"/>
+                        <a:srgbClr val="F6EBD5"/>
                       </a:solidFill>
                       <a:prstDash val="solid"/>
                     </a:lnB>
                     <a:solidFill>
-                      <a:srgbClr val="FCF7EE"/>
+                      <a:srgbClr val="FBF6EC"/>
                     </a:solidFill>
                   </a:tcPr>
                 </a:tc>
@@ -5002,7 +5213,7 @@
                       <a:r>
                         <a:rPr sz="1400" b="0">
                           <a:solidFill>
-                            <a:srgbClr val="2B2B2B"/>
+                            <a:srgbClr val="26231F"/>
                           </a:solidFill>
                         </a:rPr>
                         <a:t/>
@@ -5012,30 +5223,30 @@
                   <a:tcPr anchor="ctr" marL="73152" marR="73152">
                     <a:lnL w="9525" cap="flat" cmpd="sng" algn="ctr">
                       <a:solidFill>
-                        <a:srgbClr val="F7E8C9"/>
+                        <a:srgbClr val="F6EBD5"/>
                       </a:solidFill>
                       <a:prstDash val="solid"/>
                     </a:lnL>
                     <a:lnR w="9525" cap="flat" cmpd="sng" algn="ctr">
                       <a:solidFill>
-                        <a:srgbClr val="F7E8C9"/>
+                        <a:srgbClr val="F6EBD5"/>
                       </a:solidFill>
                       <a:prstDash val="solid"/>
                     </a:lnR>
                     <a:lnT w="9525" cap="flat" cmpd="sng" algn="ctr">
                       <a:solidFill>
-                        <a:srgbClr val="F7E8C9"/>
+                        <a:srgbClr val="F6EBD5"/>
                       </a:solidFill>
                       <a:prstDash val="solid"/>
                     </a:lnT>
                     <a:lnB w="9525" cap="flat" cmpd="sng" algn="ctr">
                       <a:solidFill>
-                        <a:srgbClr val="F7E8C9"/>
+                        <a:srgbClr val="F6EBD5"/>
                       </a:solidFill>
                       <a:prstDash val="solid"/>
                     </a:lnB>
                     <a:solidFill>
-                      <a:srgbClr val="FCF7EE"/>
+                      <a:srgbClr val="FBF6EC"/>
                     </a:solidFill>
                   </a:tcPr>
                 </a:tc>
@@ -5048,7 +5259,7 @@
                       <a:r>
                         <a:rPr sz="1400" b="0">
                           <a:solidFill>
-                            <a:srgbClr val="2B2B2B"/>
+                            <a:srgbClr val="26231F"/>
                           </a:solidFill>
                         </a:rPr>
                         <a:t/>
@@ -5058,30 +5269,30 @@
                   <a:tcPr anchor="ctr" marL="73152" marR="73152">
                     <a:lnL w="9525" cap="flat" cmpd="sng" algn="ctr">
                       <a:solidFill>
-                        <a:srgbClr val="F7E8C9"/>
+                        <a:srgbClr val="F6EBD5"/>
                       </a:solidFill>
                       <a:prstDash val="solid"/>
                     </a:lnL>
                     <a:lnR w="9525" cap="flat" cmpd="sng" algn="ctr">
                       <a:solidFill>
-                        <a:srgbClr val="F7E8C9"/>
+                        <a:srgbClr val="F6EBD5"/>
                       </a:solidFill>
                       <a:prstDash val="solid"/>
                     </a:lnR>
                     <a:lnT w="9525" cap="flat" cmpd="sng" algn="ctr">
                       <a:solidFill>
-                        <a:srgbClr val="F7E8C9"/>
+                        <a:srgbClr val="F6EBD5"/>
                       </a:solidFill>
                       <a:prstDash val="solid"/>
                     </a:lnT>
                     <a:lnB w="9525" cap="flat" cmpd="sng" algn="ctr">
                       <a:solidFill>
-                        <a:srgbClr val="F7E8C9"/>
+                        <a:srgbClr val="F6EBD5"/>
                       </a:solidFill>
                       <a:prstDash val="solid"/>
                     </a:lnB>
                     <a:solidFill>
-                      <a:srgbClr val="FCF7EE"/>
+                      <a:srgbClr val="FBF6EC"/>
                     </a:solidFill>
                   </a:tcPr>
                 </a:tc>
@@ -5096,7 +5307,7 @@
                       <a:r>
                         <a:rPr sz="1400" b="0">
                           <a:solidFill>
-                            <a:srgbClr val="2B2B2B"/>
+                            <a:srgbClr val="26231F"/>
                           </a:solidFill>
                         </a:rPr>
                         <a:t/>
@@ -5106,25 +5317,25 @@
                   <a:tcPr anchor="ctr" marL="73152" marR="73152">
                     <a:lnL w="9525" cap="flat" cmpd="sng" algn="ctr">
                       <a:solidFill>
-                        <a:srgbClr val="F7E8C9"/>
+                        <a:srgbClr val="F6EBD5"/>
                       </a:solidFill>
                       <a:prstDash val="solid"/>
                     </a:lnL>
                     <a:lnR w="9525" cap="flat" cmpd="sng" algn="ctr">
                       <a:solidFill>
-                        <a:srgbClr val="F7E8C9"/>
+                        <a:srgbClr val="F6EBD5"/>
                       </a:solidFill>
                       <a:prstDash val="solid"/>
                     </a:lnR>
                     <a:lnT w="9525" cap="flat" cmpd="sng" algn="ctr">
                       <a:solidFill>
-                        <a:srgbClr val="F7E8C9"/>
+                        <a:srgbClr val="F6EBD5"/>
                       </a:solidFill>
                       <a:prstDash val="solid"/>
                     </a:lnT>
                     <a:lnB w="9525" cap="flat" cmpd="sng" algn="ctr">
                       <a:solidFill>
-                        <a:srgbClr val="F7E8C9"/>
+                        <a:srgbClr val="F6EBD5"/>
                       </a:solidFill>
                       <a:prstDash val="solid"/>
                     </a:lnB>
@@ -5142,7 +5353,7 @@
                       <a:r>
                         <a:rPr sz="1400" b="0">
                           <a:solidFill>
-                            <a:srgbClr val="2B2B2B"/>
+                            <a:srgbClr val="26231F"/>
                           </a:solidFill>
                         </a:rPr>
                         <a:t/>
@@ -5152,25 +5363,25 @@
                   <a:tcPr anchor="ctr" marL="73152" marR="73152">
                     <a:lnL w="9525" cap="flat" cmpd="sng" algn="ctr">
                       <a:solidFill>
-                        <a:srgbClr val="F7E8C9"/>
+                        <a:srgbClr val="F6EBD5"/>
                       </a:solidFill>
                       <a:prstDash val="solid"/>
                     </a:lnL>
                     <a:lnR w="9525" cap="flat" cmpd="sng" algn="ctr">
                       <a:solidFill>
-                        <a:srgbClr val="F7E8C9"/>
+                        <a:srgbClr val="F6EBD5"/>
                       </a:solidFill>
                       <a:prstDash val="solid"/>
                     </a:lnR>
                     <a:lnT w="9525" cap="flat" cmpd="sng" algn="ctr">
                       <a:solidFill>
-                        <a:srgbClr val="F7E8C9"/>
+                        <a:srgbClr val="F6EBD5"/>
                       </a:solidFill>
                       <a:prstDash val="solid"/>
                     </a:lnT>
                     <a:lnB w="9525" cap="flat" cmpd="sng" algn="ctr">
                       <a:solidFill>
-                        <a:srgbClr val="F7E8C9"/>
+                        <a:srgbClr val="F6EBD5"/>
                       </a:solidFill>
                       <a:prstDash val="solid"/>
                     </a:lnB>
@@ -5188,7 +5399,7 @@
                       <a:r>
                         <a:rPr sz="1400" b="0">
                           <a:solidFill>
-                            <a:srgbClr val="2B2B2B"/>
+                            <a:srgbClr val="26231F"/>
                           </a:solidFill>
                         </a:rPr>
                         <a:t/>
@@ -5198,25 +5409,25 @@
                   <a:tcPr anchor="ctr" marL="73152" marR="73152">
                     <a:lnL w="9525" cap="flat" cmpd="sng" algn="ctr">
                       <a:solidFill>
-                        <a:srgbClr val="F7E8C9"/>
+                        <a:srgbClr val="F6EBD5"/>
                       </a:solidFill>
                       <a:prstDash val="solid"/>
                     </a:lnL>
                     <a:lnR w="9525" cap="flat" cmpd="sng" algn="ctr">
                       <a:solidFill>
-                        <a:srgbClr val="F7E8C9"/>
+                        <a:srgbClr val="F6EBD5"/>
                       </a:solidFill>
                       <a:prstDash val="solid"/>
                     </a:lnR>
                     <a:lnT w="9525" cap="flat" cmpd="sng" algn="ctr">
                       <a:solidFill>
-                        <a:srgbClr val="F7E8C9"/>
+                        <a:srgbClr val="F6EBD5"/>
                       </a:solidFill>
                       <a:prstDash val="solid"/>
                     </a:lnT>
                     <a:lnB w="9525" cap="flat" cmpd="sng" algn="ctr">
                       <a:solidFill>
-                        <a:srgbClr val="F7E8C9"/>
+                        <a:srgbClr val="F6EBD5"/>
                       </a:solidFill>
                       <a:prstDash val="solid"/>
                     </a:lnB>
@@ -5234,7 +5445,7 @@
                       <a:r>
                         <a:rPr sz="1400" b="0">
                           <a:solidFill>
-                            <a:srgbClr val="2B2B2B"/>
+                            <a:srgbClr val="26231F"/>
                           </a:solidFill>
                         </a:rPr>
                         <a:t/>
@@ -5244,25 +5455,25 @@
                   <a:tcPr anchor="ctr" marL="73152" marR="73152">
                     <a:lnL w="9525" cap="flat" cmpd="sng" algn="ctr">
                       <a:solidFill>
-                        <a:srgbClr val="F7E8C9"/>
+                        <a:srgbClr val="F6EBD5"/>
                       </a:solidFill>
                       <a:prstDash val="solid"/>
                     </a:lnL>
                     <a:lnR w="9525" cap="flat" cmpd="sng" algn="ctr">
                       <a:solidFill>
-                        <a:srgbClr val="F7E8C9"/>
+                        <a:srgbClr val="F6EBD5"/>
                       </a:solidFill>
                       <a:prstDash val="solid"/>
                     </a:lnR>
                     <a:lnT w="9525" cap="flat" cmpd="sng" algn="ctr">
                       <a:solidFill>
-                        <a:srgbClr val="F7E8C9"/>
+                        <a:srgbClr val="F6EBD5"/>
                       </a:solidFill>
                       <a:prstDash val="solid"/>
                     </a:lnT>
                     <a:lnB w="9525" cap="flat" cmpd="sng" algn="ctr">
                       <a:solidFill>
-                        <a:srgbClr val="F7E8C9"/>
+                        <a:srgbClr val="F6EBD5"/>
                       </a:solidFill>
                       <a:prstDash val="solid"/>
                     </a:lnB>
@@ -5280,7 +5491,7 @@
                       <a:r>
                         <a:rPr sz="1400" b="0">
                           <a:solidFill>
-                            <a:srgbClr val="2B2B2B"/>
+                            <a:srgbClr val="26231F"/>
                           </a:solidFill>
                         </a:rPr>
                         <a:t/>
@@ -5290,25 +5501,25 @@
                   <a:tcPr anchor="ctr" marL="73152" marR="73152">
                     <a:lnL w="9525" cap="flat" cmpd="sng" algn="ctr">
                       <a:solidFill>
-                        <a:srgbClr val="F7E8C9"/>
+                        <a:srgbClr val="F6EBD5"/>
                       </a:solidFill>
                       <a:prstDash val="solid"/>
                     </a:lnL>
                     <a:lnR w="9525" cap="flat" cmpd="sng" algn="ctr">
                       <a:solidFill>
-                        <a:srgbClr val="F7E8C9"/>
+                        <a:srgbClr val="F6EBD5"/>
                       </a:solidFill>
                       <a:prstDash val="solid"/>
                     </a:lnR>
                     <a:lnT w="9525" cap="flat" cmpd="sng" algn="ctr">
                       <a:solidFill>
-                        <a:srgbClr val="F7E8C9"/>
+                        <a:srgbClr val="F6EBD5"/>
                       </a:solidFill>
                       <a:prstDash val="solid"/>
                     </a:lnT>
                     <a:lnB w="9525" cap="flat" cmpd="sng" algn="ctr">
                       <a:solidFill>
-                        <a:srgbClr val="F7E8C9"/>
+                        <a:srgbClr val="F6EBD5"/>
                       </a:solidFill>
                       <a:prstDash val="solid"/>
                     </a:lnB>
@@ -5328,7 +5539,7 @@
                       <a:r>
                         <a:rPr sz="1400" b="0">
                           <a:solidFill>
-                            <a:srgbClr val="2B2B2B"/>
+                            <a:srgbClr val="26231F"/>
                           </a:solidFill>
                         </a:rPr>
                         <a:t/>
@@ -5338,30 +5549,30 @@
                   <a:tcPr anchor="ctr" marL="73152" marR="73152">
                     <a:lnL w="9525" cap="flat" cmpd="sng" algn="ctr">
                       <a:solidFill>
-                        <a:srgbClr val="F7E8C9"/>
+                        <a:srgbClr val="F6EBD5"/>
                       </a:solidFill>
                       <a:prstDash val="solid"/>
                     </a:lnL>
                     <a:lnR w="9525" cap="flat" cmpd="sng" algn="ctr">
                       <a:solidFill>
-                        <a:srgbClr val="F7E8C9"/>
+                        <a:srgbClr val="F6EBD5"/>
                       </a:solidFill>
                       <a:prstDash val="solid"/>
                     </a:lnR>
                     <a:lnT w="9525" cap="flat" cmpd="sng" algn="ctr">
                       <a:solidFill>
-                        <a:srgbClr val="F7E8C9"/>
+                        <a:srgbClr val="F6EBD5"/>
                       </a:solidFill>
                       <a:prstDash val="solid"/>
                     </a:lnT>
                     <a:lnB w="9525" cap="flat" cmpd="sng" algn="ctr">
                       <a:solidFill>
-                        <a:srgbClr val="F7E8C9"/>
+                        <a:srgbClr val="F6EBD5"/>
                       </a:solidFill>
                       <a:prstDash val="solid"/>
                     </a:lnB>
                     <a:solidFill>
-                      <a:srgbClr val="FCF7EE"/>
+                      <a:srgbClr val="FBF6EC"/>
                     </a:solidFill>
                   </a:tcPr>
                 </a:tc>
@@ -5374,7 +5585,7 @@
                       <a:r>
                         <a:rPr sz="1400" b="0">
                           <a:solidFill>
-                            <a:srgbClr val="2B2B2B"/>
+                            <a:srgbClr val="26231F"/>
                           </a:solidFill>
                         </a:rPr>
                         <a:t/>
@@ -5384,30 +5595,30 @@
                   <a:tcPr anchor="ctr" marL="73152" marR="73152">
                     <a:lnL w="9525" cap="flat" cmpd="sng" algn="ctr">
                       <a:solidFill>
-                        <a:srgbClr val="F7E8C9"/>
+                        <a:srgbClr val="F6EBD5"/>
                       </a:solidFill>
                       <a:prstDash val="solid"/>
                     </a:lnL>
                     <a:lnR w="9525" cap="flat" cmpd="sng" algn="ctr">
                       <a:solidFill>
-                        <a:srgbClr val="F7E8C9"/>
+                        <a:srgbClr val="F6EBD5"/>
                       </a:solidFill>
                       <a:prstDash val="solid"/>
                     </a:lnR>
                     <a:lnT w="9525" cap="flat" cmpd="sng" algn="ctr">
                       <a:solidFill>
-                        <a:srgbClr val="F7E8C9"/>
+                        <a:srgbClr val="F6EBD5"/>
                       </a:solidFill>
                       <a:prstDash val="solid"/>
                     </a:lnT>
                     <a:lnB w="9525" cap="flat" cmpd="sng" algn="ctr">
                       <a:solidFill>
-                        <a:srgbClr val="F7E8C9"/>
+                        <a:srgbClr val="F6EBD5"/>
                       </a:solidFill>
                       <a:prstDash val="solid"/>
                     </a:lnB>
                     <a:solidFill>
-                      <a:srgbClr val="FCF7EE"/>
+                      <a:srgbClr val="FBF6EC"/>
                     </a:solidFill>
                   </a:tcPr>
                 </a:tc>
@@ -5420,7 +5631,7 @@
                       <a:r>
                         <a:rPr sz="1400" b="0">
                           <a:solidFill>
-                            <a:srgbClr val="2B2B2B"/>
+                            <a:srgbClr val="26231F"/>
                           </a:solidFill>
                         </a:rPr>
                         <a:t/>
@@ -5430,30 +5641,30 @@
                   <a:tcPr anchor="ctr" marL="73152" marR="73152">
                     <a:lnL w="9525" cap="flat" cmpd="sng" algn="ctr">
                       <a:solidFill>
-                        <a:srgbClr val="F7E8C9"/>
+                        <a:srgbClr val="F6EBD5"/>
                       </a:solidFill>
                       <a:prstDash val="solid"/>
                     </a:lnL>
                     <a:lnR w="9525" cap="flat" cmpd="sng" algn="ctr">
                       <a:solidFill>
-                        <a:srgbClr val="F7E8C9"/>
+                        <a:srgbClr val="F6EBD5"/>
                       </a:solidFill>
                       <a:prstDash val="solid"/>
                     </a:lnR>
                     <a:lnT w="9525" cap="flat" cmpd="sng" algn="ctr">
                       <a:solidFill>
-                        <a:srgbClr val="F7E8C9"/>
+                        <a:srgbClr val="F6EBD5"/>
                       </a:solidFill>
                       <a:prstDash val="solid"/>
                     </a:lnT>
                     <a:lnB w="9525" cap="flat" cmpd="sng" algn="ctr">
                       <a:solidFill>
-                        <a:srgbClr val="F7E8C9"/>
+                        <a:srgbClr val="F6EBD5"/>
                       </a:solidFill>
                       <a:prstDash val="solid"/>
                     </a:lnB>
                     <a:solidFill>
-                      <a:srgbClr val="FCF7EE"/>
+                      <a:srgbClr val="FBF6EC"/>
                     </a:solidFill>
                   </a:tcPr>
                 </a:tc>
@@ -5466,7 +5677,7 @@
                       <a:r>
                         <a:rPr sz="1400" b="0">
                           <a:solidFill>
-                            <a:srgbClr val="2B2B2B"/>
+                            <a:srgbClr val="26231F"/>
                           </a:solidFill>
                         </a:rPr>
                         <a:t/>
@@ -5476,30 +5687,30 @@
                   <a:tcPr anchor="ctr" marL="73152" marR="73152">
                     <a:lnL w="9525" cap="flat" cmpd="sng" algn="ctr">
                       <a:solidFill>
-                        <a:srgbClr val="F7E8C9"/>
+                        <a:srgbClr val="F6EBD5"/>
                       </a:solidFill>
                       <a:prstDash val="solid"/>
                     </a:lnL>
                     <a:lnR w="9525" cap="flat" cmpd="sng" algn="ctr">
                       <a:solidFill>
-                        <a:srgbClr val="F7E8C9"/>
+                        <a:srgbClr val="F6EBD5"/>
                       </a:solidFill>
                       <a:prstDash val="solid"/>
                     </a:lnR>
                     <a:lnT w="9525" cap="flat" cmpd="sng" algn="ctr">
                       <a:solidFill>
-                        <a:srgbClr val="F7E8C9"/>
+                        <a:srgbClr val="F6EBD5"/>
                       </a:solidFill>
                       <a:prstDash val="solid"/>
                     </a:lnT>
                     <a:lnB w="9525" cap="flat" cmpd="sng" algn="ctr">
                       <a:solidFill>
-                        <a:srgbClr val="F7E8C9"/>
+                        <a:srgbClr val="F6EBD5"/>
                       </a:solidFill>
                       <a:prstDash val="solid"/>
                     </a:lnB>
                     <a:solidFill>
-                      <a:srgbClr val="FCF7EE"/>
+                      <a:srgbClr val="FBF6EC"/>
                     </a:solidFill>
                   </a:tcPr>
                 </a:tc>
@@ -5512,7 +5723,7 @@
                       <a:r>
                         <a:rPr sz="1400" b="0">
                           <a:solidFill>
-                            <a:srgbClr val="2B2B2B"/>
+                            <a:srgbClr val="26231F"/>
                           </a:solidFill>
                         </a:rPr>
                         <a:t/>
@@ -5522,30 +5733,30 @@
                   <a:tcPr anchor="ctr" marL="73152" marR="73152">
                     <a:lnL w="9525" cap="flat" cmpd="sng" algn="ctr">
                       <a:solidFill>
-                        <a:srgbClr val="F7E8C9"/>
+                        <a:srgbClr val="F6EBD5"/>
                       </a:solidFill>
                       <a:prstDash val="solid"/>
                     </a:lnL>
                     <a:lnR w="9525" cap="flat" cmpd="sng" algn="ctr">
                       <a:solidFill>
-                        <a:srgbClr val="F7E8C9"/>
+                        <a:srgbClr val="F6EBD5"/>
                       </a:solidFill>
                       <a:prstDash val="solid"/>
                     </a:lnR>
                     <a:lnT w="9525" cap="flat" cmpd="sng" algn="ctr">
                       <a:solidFill>
-                        <a:srgbClr val="F7E8C9"/>
+                        <a:srgbClr val="F6EBD5"/>
                       </a:solidFill>
                       <a:prstDash val="solid"/>
                     </a:lnT>
                     <a:lnB w="9525" cap="flat" cmpd="sng" algn="ctr">
                       <a:solidFill>
-                        <a:srgbClr val="F7E8C9"/>
+                        <a:srgbClr val="F6EBD5"/>
                       </a:solidFill>
                       <a:prstDash val="solid"/>
                     </a:lnB>
                     <a:solidFill>
-                      <a:srgbClr val="FCF7EE"/>
+                      <a:srgbClr val="FBF6EC"/>
                     </a:solidFill>
                   </a:tcPr>
                 </a:tc>
@@ -5560,7 +5771,7 @@
                       <a:r>
                         <a:rPr sz="1400" b="0">
                           <a:solidFill>
-                            <a:srgbClr val="2B2B2B"/>
+                            <a:srgbClr val="26231F"/>
                           </a:solidFill>
                         </a:rPr>
                         <a:t/>
@@ -5570,25 +5781,25 @@
                   <a:tcPr anchor="ctr" marL="73152" marR="73152">
                     <a:lnL w="9525" cap="flat" cmpd="sng" algn="ctr">
                       <a:solidFill>
-                        <a:srgbClr val="F7E8C9"/>
+                        <a:srgbClr val="F6EBD5"/>
                       </a:solidFill>
                       <a:prstDash val="solid"/>
                     </a:lnL>
                     <a:lnR w="9525" cap="flat" cmpd="sng" algn="ctr">
                       <a:solidFill>
-                        <a:srgbClr val="F7E8C9"/>
+                        <a:srgbClr val="F6EBD5"/>
                       </a:solidFill>
                       <a:prstDash val="solid"/>
                     </a:lnR>
                     <a:lnT w="9525" cap="flat" cmpd="sng" algn="ctr">
                       <a:solidFill>
-                        <a:srgbClr val="F7E8C9"/>
+                        <a:srgbClr val="F6EBD5"/>
                       </a:solidFill>
                       <a:prstDash val="solid"/>
                     </a:lnT>
                     <a:lnB w="9525" cap="flat" cmpd="sng" algn="ctr">
                       <a:solidFill>
-                        <a:srgbClr val="F7E8C9"/>
+                        <a:srgbClr val="F6EBD5"/>
                       </a:solidFill>
                       <a:prstDash val="solid"/>
                     </a:lnB>
@@ -5606,7 +5817,7 @@
                       <a:r>
                         <a:rPr sz="1400" b="0">
                           <a:solidFill>
-                            <a:srgbClr val="2B2B2B"/>
+                            <a:srgbClr val="26231F"/>
                           </a:solidFill>
                         </a:rPr>
                         <a:t/>
@@ -5616,25 +5827,25 @@
                   <a:tcPr anchor="ctr" marL="73152" marR="73152">
                     <a:lnL w="9525" cap="flat" cmpd="sng" algn="ctr">
                       <a:solidFill>
-                        <a:srgbClr val="F7E8C9"/>
+                        <a:srgbClr val="F6EBD5"/>
                       </a:solidFill>
                       <a:prstDash val="solid"/>
                     </a:lnL>
                     <a:lnR w="9525" cap="flat" cmpd="sng" algn="ctr">
                       <a:solidFill>
-                        <a:srgbClr val="F7E8C9"/>
+                        <a:srgbClr val="F6EBD5"/>
                       </a:solidFill>
                       <a:prstDash val="solid"/>
                     </a:lnR>
                     <a:lnT w="9525" cap="flat" cmpd="sng" algn="ctr">
                       <a:solidFill>
-                        <a:srgbClr val="F7E8C9"/>
+                        <a:srgbClr val="F6EBD5"/>
                       </a:solidFill>
                       <a:prstDash val="solid"/>
                     </a:lnT>
                     <a:lnB w="9525" cap="flat" cmpd="sng" algn="ctr">
                       <a:solidFill>
-                        <a:srgbClr val="F7E8C9"/>
+                        <a:srgbClr val="F6EBD5"/>
                       </a:solidFill>
                       <a:prstDash val="solid"/>
                     </a:lnB>
@@ -5652,7 +5863,7 @@
                       <a:r>
                         <a:rPr sz="1400" b="0">
                           <a:solidFill>
-                            <a:srgbClr val="2B2B2B"/>
+                            <a:srgbClr val="26231F"/>
                           </a:solidFill>
                         </a:rPr>
                         <a:t/>
@@ -5662,25 +5873,25 @@
                   <a:tcPr anchor="ctr" marL="73152" marR="73152">
                     <a:lnL w="9525" cap="flat" cmpd="sng" algn="ctr">
                       <a:solidFill>
-                        <a:srgbClr val="F7E8C9"/>
+                        <a:srgbClr val="F6EBD5"/>
                       </a:solidFill>
                       <a:prstDash val="solid"/>
                     </a:lnL>
                     <a:lnR w="9525" cap="flat" cmpd="sng" algn="ctr">
                       <a:solidFill>
-                        <a:srgbClr val="F7E8C9"/>
+                        <a:srgbClr val="F6EBD5"/>
                       </a:solidFill>
                       <a:prstDash val="solid"/>
                     </a:lnR>
                     <a:lnT w="9525" cap="flat" cmpd="sng" algn="ctr">
                       <a:solidFill>
-                        <a:srgbClr val="F7E8C9"/>
+                        <a:srgbClr val="F6EBD5"/>
                       </a:solidFill>
                       <a:prstDash val="solid"/>
                     </a:lnT>
                     <a:lnB w="9525" cap="flat" cmpd="sng" algn="ctr">
                       <a:solidFill>
-                        <a:srgbClr val="F7E8C9"/>
+                        <a:srgbClr val="F6EBD5"/>
                       </a:solidFill>
                       <a:prstDash val="solid"/>
                     </a:lnB>
@@ -5698,7 +5909,7 @@
                       <a:r>
                         <a:rPr sz="1400" b="0">
                           <a:solidFill>
-                            <a:srgbClr val="2B2B2B"/>
+                            <a:srgbClr val="26231F"/>
                           </a:solidFill>
                         </a:rPr>
                         <a:t/>
@@ -5708,25 +5919,25 @@
                   <a:tcPr anchor="ctr" marL="73152" marR="73152">
                     <a:lnL w="9525" cap="flat" cmpd="sng" algn="ctr">
                       <a:solidFill>
-                        <a:srgbClr val="F7E8C9"/>
+                        <a:srgbClr val="F6EBD5"/>
                       </a:solidFill>
                       <a:prstDash val="solid"/>
                     </a:lnL>
                     <a:lnR w="9525" cap="flat" cmpd="sng" algn="ctr">
                       <a:solidFill>
-                        <a:srgbClr val="F7E8C9"/>
+                        <a:srgbClr val="F6EBD5"/>
                       </a:solidFill>
                       <a:prstDash val="solid"/>
                     </a:lnR>
                     <a:lnT w="9525" cap="flat" cmpd="sng" algn="ctr">
                       <a:solidFill>
-                        <a:srgbClr val="F7E8C9"/>
+                        <a:srgbClr val="F6EBD5"/>
                       </a:solidFill>
                       <a:prstDash val="solid"/>
                     </a:lnT>
                     <a:lnB w="9525" cap="flat" cmpd="sng" algn="ctr">
                       <a:solidFill>
-                        <a:srgbClr val="F7E8C9"/>
+                        <a:srgbClr val="F6EBD5"/>
                       </a:solidFill>
                       <a:prstDash val="solid"/>
                     </a:lnB>
@@ -5744,7 +5955,7 @@
                       <a:r>
                         <a:rPr sz="1400" b="0">
                           <a:solidFill>
-                            <a:srgbClr val="2B2B2B"/>
+                            <a:srgbClr val="26231F"/>
                           </a:solidFill>
                         </a:rPr>
                         <a:t/>
@@ -5754,25 +5965,25 @@
                   <a:tcPr anchor="ctr" marL="73152" marR="73152">
                     <a:lnL w="9525" cap="flat" cmpd="sng" algn="ctr">
                       <a:solidFill>
-                        <a:srgbClr val="F7E8C9"/>
+                        <a:srgbClr val="F6EBD5"/>
                       </a:solidFill>
                       <a:prstDash val="solid"/>
                     </a:lnL>
                     <a:lnR w="9525" cap="flat" cmpd="sng" algn="ctr">
                       <a:solidFill>
-                        <a:srgbClr val="F7E8C9"/>
+                        <a:srgbClr val="F6EBD5"/>
                       </a:solidFill>
                       <a:prstDash val="solid"/>
                     </a:lnR>
                     <a:lnT w="9525" cap="flat" cmpd="sng" algn="ctr">
                       <a:solidFill>
-                        <a:srgbClr val="F7E8C9"/>
+                        <a:srgbClr val="F6EBD5"/>
                       </a:solidFill>
                       <a:prstDash val="solid"/>
                     </a:lnT>
                     <a:lnB w="9525" cap="flat" cmpd="sng" algn="ctr">
                       <a:solidFill>
-                        <a:srgbClr val="F7E8C9"/>
+                        <a:srgbClr val="F6EBD5"/>
                       </a:solidFill>
                       <a:prstDash val="solid"/>
                     </a:lnB>
@@ -5792,7 +6003,7 @@
                       <a:r>
                         <a:rPr sz="1400" b="0">
                           <a:solidFill>
-                            <a:srgbClr val="2B2B2B"/>
+                            <a:srgbClr val="26231F"/>
                           </a:solidFill>
                         </a:rPr>
                         <a:t/>
@@ -5802,30 +6013,30 @@
                   <a:tcPr anchor="ctr" marL="73152" marR="73152">
                     <a:lnL w="9525" cap="flat" cmpd="sng" algn="ctr">
                       <a:solidFill>
-                        <a:srgbClr val="F7E8C9"/>
+                        <a:srgbClr val="F6EBD5"/>
                       </a:solidFill>
                       <a:prstDash val="solid"/>
                     </a:lnL>
                     <a:lnR w="9525" cap="flat" cmpd="sng" algn="ctr">
                       <a:solidFill>
-                        <a:srgbClr val="F7E8C9"/>
+                        <a:srgbClr val="F6EBD5"/>
                       </a:solidFill>
                       <a:prstDash val="solid"/>
                     </a:lnR>
                     <a:lnT w="9525" cap="flat" cmpd="sng" algn="ctr">
                       <a:solidFill>
-                        <a:srgbClr val="F7E8C9"/>
+                        <a:srgbClr val="F6EBD5"/>
                       </a:solidFill>
                       <a:prstDash val="solid"/>
                     </a:lnT>
                     <a:lnB w="9525" cap="flat" cmpd="sng" algn="ctr">
                       <a:solidFill>
-                        <a:srgbClr val="F7E8C9"/>
+                        <a:srgbClr val="F6EBD5"/>
                       </a:solidFill>
                       <a:prstDash val="solid"/>
                     </a:lnB>
                     <a:solidFill>
-                      <a:srgbClr val="FCF7EE"/>
+                      <a:srgbClr val="FBF6EC"/>
                     </a:solidFill>
                   </a:tcPr>
                 </a:tc>
@@ -5838,7 +6049,7 @@
                       <a:r>
                         <a:rPr sz="1400" b="0">
                           <a:solidFill>
-                            <a:srgbClr val="2B2B2B"/>
+                            <a:srgbClr val="26231F"/>
                           </a:solidFill>
                         </a:rPr>
                         <a:t/>
@@ -5848,30 +6059,30 @@
                   <a:tcPr anchor="ctr" marL="73152" marR="73152">
                     <a:lnL w="9525" cap="flat" cmpd="sng" algn="ctr">
                       <a:solidFill>
-                        <a:srgbClr val="F7E8C9"/>
+                        <a:srgbClr val="F6EBD5"/>
                       </a:solidFill>
                       <a:prstDash val="solid"/>
                     </a:lnL>
                     <a:lnR w="9525" cap="flat" cmpd="sng" algn="ctr">
                       <a:solidFill>
-                        <a:srgbClr val="F7E8C9"/>
+                        <a:srgbClr val="F6EBD5"/>
                       </a:solidFill>
                       <a:prstDash val="solid"/>
                     </a:lnR>
                     <a:lnT w="9525" cap="flat" cmpd="sng" algn="ctr">
                       <a:solidFill>
-                        <a:srgbClr val="F7E8C9"/>
+                        <a:srgbClr val="F6EBD5"/>
                       </a:solidFill>
                       <a:prstDash val="solid"/>
                     </a:lnT>
                     <a:lnB w="9525" cap="flat" cmpd="sng" algn="ctr">
                       <a:solidFill>
-                        <a:srgbClr val="F7E8C9"/>
+                        <a:srgbClr val="F6EBD5"/>
                       </a:solidFill>
                       <a:prstDash val="solid"/>
                     </a:lnB>
                     <a:solidFill>
-                      <a:srgbClr val="FCF7EE"/>
+                      <a:srgbClr val="FBF6EC"/>
                     </a:solidFill>
                   </a:tcPr>
                 </a:tc>
@@ -5884,7 +6095,7 @@
                       <a:r>
                         <a:rPr sz="1400" b="0">
                           <a:solidFill>
-                            <a:srgbClr val="2B2B2B"/>
+                            <a:srgbClr val="26231F"/>
                           </a:solidFill>
                         </a:rPr>
                         <a:t/>
@@ -5894,30 +6105,30 @@
                   <a:tcPr anchor="ctr" marL="73152" marR="73152">
                     <a:lnL w="9525" cap="flat" cmpd="sng" algn="ctr">
                       <a:solidFill>
-                        <a:srgbClr val="F7E8C9"/>
+                        <a:srgbClr val="F6EBD5"/>
                       </a:solidFill>
                       <a:prstDash val="solid"/>
                     </a:lnL>
                     <a:lnR w="9525" cap="flat" cmpd="sng" algn="ctr">
                       <a:solidFill>
-                        <a:srgbClr val="F7E8C9"/>
+                        <a:srgbClr val="F6EBD5"/>
                       </a:solidFill>
                       <a:prstDash val="solid"/>
                     </a:lnR>
                     <a:lnT w="9525" cap="flat" cmpd="sng" algn="ctr">
                       <a:solidFill>
-                        <a:srgbClr val="F7E8C9"/>
+                        <a:srgbClr val="F6EBD5"/>
                       </a:solidFill>
                       <a:prstDash val="solid"/>
                     </a:lnT>
                     <a:lnB w="9525" cap="flat" cmpd="sng" algn="ctr">
                       <a:solidFill>
-                        <a:srgbClr val="F7E8C9"/>
+                        <a:srgbClr val="F6EBD5"/>
                       </a:solidFill>
                       <a:prstDash val="solid"/>
                     </a:lnB>
                     <a:solidFill>
-                      <a:srgbClr val="FCF7EE"/>
+                      <a:srgbClr val="FBF6EC"/>
                     </a:solidFill>
                   </a:tcPr>
                 </a:tc>
@@ -5930,7 +6141,7 @@
                       <a:r>
                         <a:rPr sz="1400" b="0">
                           <a:solidFill>
-                            <a:srgbClr val="2B2B2B"/>
+                            <a:srgbClr val="26231F"/>
                           </a:solidFill>
                         </a:rPr>
                         <a:t/>
@@ -5940,30 +6151,30 @@
                   <a:tcPr anchor="ctr" marL="73152" marR="73152">
                     <a:lnL w="9525" cap="flat" cmpd="sng" algn="ctr">
                       <a:solidFill>
-                        <a:srgbClr val="F7E8C9"/>
+                        <a:srgbClr val="F6EBD5"/>
                       </a:solidFill>
                       <a:prstDash val="solid"/>
                     </a:lnL>
                     <a:lnR w="9525" cap="flat" cmpd="sng" algn="ctr">
                       <a:solidFill>
-                        <a:srgbClr val="F7E8C9"/>
+                        <a:srgbClr val="F6EBD5"/>
                       </a:solidFill>
                       <a:prstDash val="solid"/>
                     </a:lnR>
                     <a:lnT w="9525" cap="flat" cmpd="sng" algn="ctr">
                       <a:solidFill>
-                        <a:srgbClr val="F7E8C9"/>
+                        <a:srgbClr val="F6EBD5"/>
                       </a:solidFill>
                       <a:prstDash val="solid"/>
                     </a:lnT>
                     <a:lnB w="9525" cap="flat" cmpd="sng" algn="ctr">
                       <a:solidFill>
-                        <a:srgbClr val="F7E8C9"/>
+                        <a:srgbClr val="F6EBD5"/>
                       </a:solidFill>
                       <a:prstDash val="solid"/>
                     </a:lnB>
                     <a:solidFill>
-                      <a:srgbClr val="FCF7EE"/>
+                      <a:srgbClr val="FBF6EC"/>
                     </a:solidFill>
                   </a:tcPr>
                 </a:tc>
@@ -5976,7 +6187,7 @@
                       <a:r>
                         <a:rPr sz="1400" b="0">
                           <a:solidFill>
-                            <a:srgbClr val="2B2B2B"/>
+                            <a:srgbClr val="26231F"/>
                           </a:solidFill>
                         </a:rPr>
                         <a:t/>
@@ -5986,30 +6197,30 @@
                   <a:tcPr anchor="ctr" marL="73152" marR="73152">
                     <a:lnL w="9525" cap="flat" cmpd="sng" algn="ctr">
                       <a:solidFill>
-                        <a:srgbClr val="F7E8C9"/>
+                        <a:srgbClr val="F6EBD5"/>
                       </a:solidFill>
                       <a:prstDash val="solid"/>
                     </a:lnL>
                     <a:lnR w="9525" cap="flat" cmpd="sng" algn="ctr">
                       <a:solidFill>
-                        <a:srgbClr val="F7E8C9"/>
+                        <a:srgbClr val="F6EBD5"/>
                       </a:solidFill>
                       <a:prstDash val="solid"/>
                     </a:lnR>
                     <a:lnT w="9525" cap="flat" cmpd="sng" algn="ctr">
                       <a:solidFill>
-                        <a:srgbClr val="F7E8C9"/>
+                        <a:srgbClr val="F6EBD5"/>
                       </a:solidFill>
                       <a:prstDash val="solid"/>
                     </a:lnT>
                     <a:lnB w="9525" cap="flat" cmpd="sng" algn="ctr">
                       <a:solidFill>
-                        <a:srgbClr val="F7E8C9"/>
+                        <a:srgbClr val="F6EBD5"/>
                       </a:solidFill>
                       <a:prstDash val="solid"/>
                     </a:lnB>
                     <a:solidFill>
-                      <a:srgbClr val="FCF7EE"/>
+                      <a:srgbClr val="FBF6EC"/>
                     </a:solidFill>
                   </a:tcPr>
                 </a:tc>
@@ -6032,7 +6243,7 @@
     <p:bg>
       <p:bgPr>
         <a:solidFill>
-          <a:srgbClr val="F7E8C9"/>
+          <a:srgbClr val="FFFFFF"/>
         </a:solidFill>
         <a:effectLst/>
       </p:bgPr>
@@ -6052,20 +6263,84 @@
         </p:nvSpPr>
         <p:spPr>
           <a:xfrm>
-            <a:off x="274320" y="274320"/>
-            <a:ext cx="11643055" cy="6309360"/>
+            <a:off x="640080" y="566928"/>
+            <a:ext cx="10911535" cy="10972"/>
           </a:xfrm>
           <a:prstGeom prst="rect">
             <a:avLst/>
           </a:prstGeom>
           <a:solidFill>
-            <a:srgbClr val="FFFFFF"/>
+            <a:srgbClr val="26231F"/>
           </a:solidFill>
-          <a:ln w="25400">
-            <a:solidFill>
-              <a:srgbClr val="C79123"/>
-            </a:solidFill>
-            <a:prstDash val="dash"/>
+          <a:ln>
+            <a:noFill/>
+          </a:ln>
+        </p:spPr>
+        <p:txBody>
+          <a:bodyPr rtlCol="0" anchor="ctr"/>
+          <a:lstStyle/>
+          <a:p>
+            <a:pPr algn="ctr"/>
+          </a:p>
+        </p:txBody>
+      </p:sp>
+      <p:sp>
+        <p:nvSpPr>
+          <p:cNvPr id="4" name="상단 라벨"/>
+          <p:cNvSpPr txBox="1"/>
+          <p:nvPr/>
+        </p:nvSpPr>
+        <p:spPr>
+          <a:xfrm>
+            <a:off x="640080" y="237744"/>
+            <a:ext cx="5486400" cy="274320"/>
+          </a:xfrm>
+          <a:prstGeom prst="rect">
+            <a:avLst/>
+          </a:prstGeom>
+          <a:noFill/>
+        </p:spPr>
+        <p:txBody>
+          <a:bodyPr wrap="square" lIns="54864" rIns="54864" tIns="27432" bIns="27432" anchor="ctr">
+            <a:noAutofit/>
+          </a:bodyPr>
+          <a:lstStyle/>
+          <a:p>
+            <a:pPr algn="l">
+              <a:lnSpc>
+                <a:spcPct val="115000"/>
+              </a:lnSpc>
+            </a:pPr>
+            <a:r>
+              <a:rPr sz="900" b="1" i="0" spc="250">
+                <a:solidFill>
+                  <a:srgbClr val="26231F"/>
+                </a:solidFill>
+              </a:rPr>
+              <a:t>INSURANCE CHECK</a:t>
+            </a:r>
+          </a:p>
+        </p:txBody>
+      </p:sp>
+      <p:sp>
+        <p:nvSpPr>
+          <p:cNvPr id="5" name="포인트"/>
+          <p:cNvSpPr/>
+          <p:nvPr/>
+        </p:nvSpPr>
+        <p:spPr>
+          <a:xfrm>
+            <a:off x="11204143" y="246888"/>
+            <a:ext cx="237744" cy="237744"/>
+          </a:xfrm>
+          <a:prstGeom prst="donut">
+            <a:avLst/>
+          </a:prstGeom>
+          <a:solidFill>
+            <a:srgbClr val="D8B879"/>
+          </a:solidFill>
+          <a:ln>
+            <a:noFill/>
           </a:ln>
         </p:spPr>
         <p:txBody>
@@ -6088,8 +6363,8 @@
         </p:nvSpPr>
         <p:spPr>
           <a:xfrm>
-            <a:off x="777240" y="548640"/>
-            <a:ext cx="9357055" cy="822960"/>
+            <a:off x="640080" y="731520"/>
+            <a:ext cx="10911535" cy="822960"/>
           </a:xfrm>
         </p:spPr>
         <p:txBody>
@@ -6106,7 +6381,7 @@
             <a:r>
               <a:rPr sz="3000" b="1" i="0">
                 <a:solidFill>
-                  <a:srgbClr val="715214"/>
+                  <a:srgbClr val="26231F"/>
                 </a:solidFill>
               </a:rPr>
               <a:t>보장 항목 체크</a:t>
@@ -6116,15 +6391,15 @@
       </p:sp>
       <p:graphicFrame>
         <p:nvGraphicFramePr>
-          <p:cNvPr id="4" name="표"/>
+          <p:cNvPr id="6" name="표"/>
           <p:cNvGraphicFramePr>
             <a:graphicFrameLocks noGrp="1"/>
           </p:cNvGraphicFramePr>
           <p:nvPr/>
         </p:nvGraphicFramePr>
         <p:xfrm>
-          <a:off x="777240" y="1554480"/>
-          <a:ext cx="10637214" cy="4773168"/>
+          <a:off x="640080" y="1783080"/>
+          <a:ext cx="10911534" cy="4773168"/>
         </p:xfrm>
         <a:graphic>
           <a:graphicData uri="http://schemas.openxmlformats.org/drawingml/2006/table">
@@ -6134,9 +6409,9 @@
               </a:tblPr>
               <a:tblGrid>
                 <a:gridCol w="3657600"/>
-                <a:gridCol w="2326538"/>
-                <a:gridCol w="2326538"/>
-                <a:gridCol w="2326538"/>
+                <a:gridCol w="2417978"/>
+                <a:gridCol w="2417978"/>
+                <a:gridCol w="2417978"/>
               </a:tblGrid>
               <a:tr h="530352">
                 <a:tc>
@@ -6148,7 +6423,7 @@
                       <a:r>
                         <a:rPr sz="1400" b="1">
                           <a:solidFill>
-                            <a:srgbClr val="FFFFFF"/>
+                            <a:srgbClr val="26231F"/>
                           </a:solidFill>
                         </a:rPr>
                         <a:t>보장 항목</a:t>
@@ -6158,30 +6433,30 @@
                   <a:tcPr anchor="ctr" marL="73152" marR="73152">
                     <a:lnL w="9525" cap="flat" cmpd="sng" algn="ctr">
                       <a:solidFill>
-                        <a:srgbClr val="C79123"/>
+                        <a:srgbClr val="D8B879"/>
                       </a:solidFill>
                       <a:prstDash val="solid"/>
                     </a:lnL>
                     <a:lnR w="9525" cap="flat" cmpd="sng" algn="ctr">
                       <a:solidFill>
-                        <a:srgbClr val="C79123"/>
+                        <a:srgbClr val="D8B879"/>
                       </a:solidFill>
                       <a:prstDash val="solid"/>
                     </a:lnR>
                     <a:lnT w="9525" cap="flat" cmpd="sng" algn="ctr">
                       <a:solidFill>
-                        <a:srgbClr val="C79123"/>
+                        <a:srgbClr val="D8B879"/>
                       </a:solidFill>
                       <a:prstDash val="solid"/>
                     </a:lnT>
                     <a:lnB w="9525" cap="flat" cmpd="sng" algn="ctr">
                       <a:solidFill>
-                        <a:srgbClr val="C79123"/>
+                        <a:srgbClr val="D8B879"/>
                       </a:solidFill>
                       <a:prstDash val="solid"/>
                     </a:lnB>
                     <a:solidFill>
-                      <a:srgbClr val="C79123"/>
+                      <a:srgbClr val="D8B879"/>
                     </a:solidFill>
                   </a:tcPr>
                 </a:tc>
@@ -6194,7 +6469,7 @@
                       <a:r>
                         <a:rPr sz="1400" b="1">
                           <a:solidFill>
-                            <a:srgbClr val="FFFFFF"/>
+                            <a:srgbClr val="26231F"/>
                           </a:solidFill>
                         </a:rPr>
                         <a:t>가입 확인</a:t>
@@ -6204,30 +6479,30 @@
                   <a:tcPr anchor="ctr" marL="73152" marR="73152">
                     <a:lnL w="9525" cap="flat" cmpd="sng" algn="ctr">
                       <a:solidFill>
-                        <a:srgbClr val="C79123"/>
+                        <a:srgbClr val="D8B879"/>
                       </a:solidFill>
                       <a:prstDash val="solid"/>
                     </a:lnL>
                     <a:lnR w="9525" cap="flat" cmpd="sng" algn="ctr">
                       <a:solidFill>
-                        <a:srgbClr val="C79123"/>
+                        <a:srgbClr val="D8B879"/>
                       </a:solidFill>
                       <a:prstDash val="solid"/>
                     </a:lnR>
                     <a:lnT w="9525" cap="flat" cmpd="sng" algn="ctr">
                       <a:solidFill>
-                        <a:srgbClr val="C79123"/>
+                        <a:srgbClr val="D8B879"/>
                       </a:solidFill>
                       <a:prstDash val="solid"/>
                     </a:lnT>
                     <a:lnB w="9525" cap="flat" cmpd="sng" algn="ctr">
                       <a:solidFill>
-                        <a:srgbClr val="C79123"/>
+                        <a:srgbClr val="D8B879"/>
                       </a:solidFill>
                       <a:prstDash val="solid"/>
                     </a:lnB>
                     <a:solidFill>
-                      <a:srgbClr val="C79123"/>
+                      <a:srgbClr val="D8B879"/>
                     </a:solidFill>
                   </a:tcPr>
                 </a:tc>
@@ -6240,7 +6515,7 @@
                       <a:r>
                         <a:rPr sz="1400" b="1">
                           <a:solidFill>
-                            <a:srgbClr val="FFFFFF"/>
+                            <a:srgbClr val="26231F"/>
                           </a:solidFill>
                         </a:rPr>
                         <a:t>확인 필요</a:t>
@@ -6250,30 +6525,30 @@
                   <a:tcPr anchor="ctr" marL="73152" marR="73152">
                     <a:lnL w="9525" cap="flat" cmpd="sng" algn="ctr">
                       <a:solidFill>
-                        <a:srgbClr val="C79123"/>
+                        <a:srgbClr val="D8B879"/>
                       </a:solidFill>
                       <a:prstDash val="solid"/>
                     </a:lnL>
                     <a:lnR w="9525" cap="flat" cmpd="sng" algn="ctr">
                       <a:solidFill>
-                        <a:srgbClr val="C79123"/>
+                        <a:srgbClr val="D8B879"/>
                       </a:solidFill>
                       <a:prstDash val="solid"/>
                     </a:lnR>
                     <a:lnT w="9525" cap="flat" cmpd="sng" algn="ctr">
                       <a:solidFill>
-                        <a:srgbClr val="C79123"/>
+                        <a:srgbClr val="D8B879"/>
                       </a:solidFill>
                       <a:prstDash val="solid"/>
                     </a:lnT>
                     <a:lnB w="9525" cap="flat" cmpd="sng" algn="ctr">
                       <a:solidFill>
-                        <a:srgbClr val="C79123"/>
+                        <a:srgbClr val="D8B879"/>
                       </a:solidFill>
                       <a:prstDash val="solid"/>
                     </a:lnB>
                     <a:solidFill>
-                      <a:srgbClr val="C79123"/>
+                      <a:srgbClr val="D8B879"/>
                     </a:solidFill>
                   </a:tcPr>
                 </a:tc>
@@ -6286,7 +6561,7 @@
                       <a:r>
                         <a:rPr sz="1400" b="1">
                           <a:solidFill>
-                            <a:srgbClr val="FFFFFF"/>
+                            <a:srgbClr val="26231F"/>
                           </a:solidFill>
                         </a:rPr>
                         <a:t>해당 없음</a:t>
@@ -6296,30 +6571,30 @@
                   <a:tcPr anchor="ctr" marL="73152" marR="73152">
                     <a:lnL w="9525" cap="flat" cmpd="sng" algn="ctr">
                       <a:solidFill>
-                        <a:srgbClr val="C79123"/>
+                        <a:srgbClr val="D8B879"/>
                       </a:solidFill>
                       <a:prstDash val="solid"/>
                     </a:lnL>
                     <a:lnR w="9525" cap="flat" cmpd="sng" algn="ctr">
                       <a:solidFill>
-                        <a:srgbClr val="C79123"/>
+                        <a:srgbClr val="D8B879"/>
                       </a:solidFill>
                       <a:prstDash val="solid"/>
                     </a:lnR>
                     <a:lnT w="9525" cap="flat" cmpd="sng" algn="ctr">
                       <a:solidFill>
-                        <a:srgbClr val="C79123"/>
+                        <a:srgbClr val="D8B879"/>
                       </a:solidFill>
                       <a:prstDash val="solid"/>
                     </a:lnT>
                     <a:lnB w="9525" cap="flat" cmpd="sng" algn="ctr">
                       <a:solidFill>
-                        <a:srgbClr val="C79123"/>
+                        <a:srgbClr val="D8B879"/>
                       </a:solidFill>
                       <a:prstDash val="solid"/>
                     </a:lnB>
                     <a:solidFill>
-                      <a:srgbClr val="C79123"/>
+                      <a:srgbClr val="D8B879"/>
                     </a:solidFill>
                   </a:tcPr>
                 </a:tc>
@@ -6334,7 +6609,7 @@
                       <a:r>
                         <a:rPr sz="1400" b="1">
                           <a:solidFill>
-                            <a:srgbClr val="715214"/>
+                            <a:srgbClr val="493E27"/>
                           </a:solidFill>
                         </a:rPr>
                         <a:t>사망·재해</a:t>
@@ -6344,30 +6619,30 @@
                   <a:tcPr anchor="ctr" marL="73152" marR="73152">
                     <a:lnL w="9525" cap="flat" cmpd="sng" algn="ctr">
                       <a:solidFill>
-                        <a:srgbClr val="F7E8C9"/>
+                        <a:srgbClr val="F6EBD5"/>
                       </a:solidFill>
                       <a:prstDash val="solid"/>
                     </a:lnL>
                     <a:lnR w="9525" cap="flat" cmpd="sng" algn="ctr">
                       <a:solidFill>
-                        <a:srgbClr val="F7E8C9"/>
+                        <a:srgbClr val="F6EBD5"/>
                       </a:solidFill>
                       <a:prstDash val="solid"/>
                     </a:lnR>
                     <a:lnT w="9525" cap="flat" cmpd="sng" algn="ctr">
                       <a:solidFill>
-                        <a:srgbClr val="F7E8C9"/>
+                        <a:srgbClr val="F6EBD5"/>
                       </a:solidFill>
                       <a:prstDash val="solid"/>
                     </a:lnT>
                     <a:lnB w="9525" cap="flat" cmpd="sng" algn="ctr">
                       <a:solidFill>
-                        <a:srgbClr val="F7E8C9"/>
+                        <a:srgbClr val="F6EBD5"/>
                       </a:solidFill>
                       <a:prstDash val="solid"/>
                     </a:lnB>
                     <a:solidFill>
-                      <a:srgbClr val="F7E8C9"/>
+                      <a:srgbClr val="F6EBD5"/>
                     </a:solidFill>
                   </a:tcPr>
                 </a:tc>
@@ -6380,7 +6655,7 @@
                       <a:r>
                         <a:rPr sz="1400" b="0">
                           <a:solidFill>
-                            <a:srgbClr val="2B2B2B"/>
+                            <a:srgbClr val="26231F"/>
                           </a:solidFill>
                         </a:rPr>
                         <a:t>□</a:t>
@@ -6390,25 +6665,25 @@
                   <a:tcPr anchor="ctr" marL="73152" marR="73152">
                     <a:lnL w="9525" cap="flat" cmpd="sng" algn="ctr">
                       <a:solidFill>
-                        <a:srgbClr val="F7E8C9"/>
+                        <a:srgbClr val="F6EBD5"/>
                       </a:solidFill>
                       <a:prstDash val="solid"/>
                     </a:lnL>
                     <a:lnR w="9525" cap="flat" cmpd="sng" algn="ctr">
                       <a:solidFill>
-                        <a:srgbClr val="F7E8C9"/>
+                        <a:srgbClr val="F6EBD5"/>
                       </a:solidFill>
                       <a:prstDash val="solid"/>
                     </a:lnR>
                     <a:lnT w="9525" cap="flat" cmpd="sng" algn="ctr">
                       <a:solidFill>
-                        <a:srgbClr val="F7E8C9"/>
+                        <a:srgbClr val="F6EBD5"/>
                       </a:solidFill>
                       <a:prstDash val="solid"/>
                     </a:lnT>
                     <a:lnB w="9525" cap="flat" cmpd="sng" algn="ctr">
                       <a:solidFill>
-                        <a:srgbClr val="F7E8C9"/>
+                        <a:srgbClr val="F6EBD5"/>
                       </a:solidFill>
                       <a:prstDash val="solid"/>
                     </a:lnB>
@@ -6426,7 +6701,7 @@
                       <a:r>
                         <a:rPr sz="1400" b="0">
                           <a:solidFill>
-                            <a:srgbClr val="2B2B2B"/>
+                            <a:srgbClr val="26231F"/>
                           </a:solidFill>
                         </a:rPr>
                         <a:t>□</a:t>
@@ -6436,25 +6711,25 @@
                   <a:tcPr anchor="ctr" marL="73152" marR="73152">
                     <a:lnL w="9525" cap="flat" cmpd="sng" algn="ctr">
                       <a:solidFill>
-                        <a:srgbClr val="F7E8C9"/>
+                        <a:srgbClr val="F6EBD5"/>
                       </a:solidFill>
                       <a:prstDash val="solid"/>
                     </a:lnL>
                     <a:lnR w="9525" cap="flat" cmpd="sng" algn="ctr">
                       <a:solidFill>
-                        <a:srgbClr val="F7E8C9"/>
+                        <a:srgbClr val="F6EBD5"/>
                       </a:solidFill>
                       <a:prstDash val="solid"/>
                     </a:lnR>
                     <a:lnT w="9525" cap="flat" cmpd="sng" algn="ctr">
                       <a:solidFill>
-                        <a:srgbClr val="F7E8C9"/>
+                        <a:srgbClr val="F6EBD5"/>
                       </a:solidFill>
                       <a:prstDash val="solid"/>
                     </a:lnT>
                     <a:lnB w="9525" cap="flat" cmpd="sng" algn="ctr">
                       <a:solidFill>
-                        <a:srgbClr val="F7E8C9"/>
+                        <a:srgbClr val="F6EBD5"/>
                       </a:solidFill>
                       <a:prstDash val="solid"/>
                     </a:lnB>
@@ -6472,7 +6747,7 @@
                       <a:r>
                         <a:rPr sz="1400" b="0">
                           <a:solidFill>
-                            <a:srgbClr val="2B2B2B"/>
+                            <a:srgbClr val="26231F"/>
                           </a:solidFill>
                         </a:rPr>
                         <a:t>□</a:t>
@@ -6482,25 +6757,25 @@
                   <a:tcPr anchor="ctr" marL="73152" marR="73152">
                     <a:lnL w="9525" cap="flat" cmpd="sng" algn="ctr">
                       <a:solidFill>
-                        <a:srgbClr val="F7E8C9"/>
+                        <a:srgbClr val="F6EBD5"/>
                       </a:solidFill>
                       <a:prstDash val="solid"/>
                     </a:lnL>
                     <a:lnR w="9525" cap="flat" cmpd="sng" algn="ctr">
                       <a:solidFill>
-                        <a:srgbClr val="F7E8C9"/>
+                        <a:srgbClr val="F6EBD5"/>
                       </a:solidFill>
                       <a:prstDash val="solid"/>
                     </a:lnR>
                     <a:lnT w="9525" cap="flat" cmpd="sng" algn="ctr">
                       <a:solidFill>
-                        <a:srgbClr val="F7E8C9"/>
+                        <a:srgbClr val="F6EBD5"/>
                       </a:solidFill>
                       <a:prstDash val="solid"/>
                     </a:lnT>
                     <a:lnB w="9525" cap="flat" cmpd="sng" algn="ctr">
                       <a:solidFill>
-                        <a:srgbClr val="F7E8C9"/>
+                        <a:srgbClr val="F6EBD5"/>
                       </a:solidFill>
                       <a:prstDash val="solid"/>
                     </a:lnB>
@@ -6520,7 +6795,7 @@
                       <a:r>
                         <a:rPr sz="1400" b="1">
                           <a:solidFill>
-                            <a:srgbClr val="715214"/>
+                            <a:srgbClr val="493E27"/>
                           </a:solidFill>
                         </a:rPr>
                         <a:t>질병 진단</a:t>
@@ -6530,30 +6805,30 @@
                   <a:tcPr anchor="ctr" marL="73152" marR="73152">
                     <a:lnL w="9525" cap="flat" cmpd="sng" algn="ctr">
                       <a:solidFill>
-                        <a:srgbClr val="F7E8C9"/>
+                        <a:srgbClr val="F6EBD5"/>
                       </a:solidFill>
                       <a:prstDash val="solid"/>
                     </a:lnL>
                     <a:lnR w="9525" cap="flat" cmpd="sng" algn="ctr">
                       <a:solidFill>
-                        <a:srgbClr val="F7E8C9"/>
+                        <a:srgbClr val="F6EBD5"/>
                       </a:solidFill>
                       <a:prstDash val="solid"/>
                     </a:lnR>
                     <a:lnT w="9525" cap="flat" cmpd="sng" algn="ctr">
                       <a:solidFill>
-                        <a:srgbClr val="F7E8C9"/>
+                        <a:srgbClr val="F6EBD5"/>
                       </a:solidFill>
                       <a:prstDash val="solid"/>
                     </a:lnT>
                     <a:lnB w="9525" cap="flat" cmpd="sng" algn="ctr">
                       <a:solidFill>
-                        <a:srgbClr val="F7E8C9"/>
+                        <a:srgbClr val="F6EBD5"/>
                       </a:solidFill>
                       <a:prstDash val="solid"/>
                     </a:lnB>
                     <a:solidFill>
-                      <a:srgbClr val="F7E8C9"/>
+                      <a:srgbClr val="F6EBD5"/>
                     </a:solidFill>
                   </a:tcPr>
                 </a:tc>
@@ -6566,7 +6841,7 @@
                       <a:r>
                         <a:rPr sz="1400" b="0">
                           <a:solidFill>
-                            <a:srgbClr val="2B2B2B"/>
+                            <a:srgbClr val="26231F"/>
                           </a:solidFill>
                         </a:rPr>
                         <a:t>□</a:t>
@@ -6576,30 +6851,30 @@
                   <a:tcPr anchor="ctr" marL="73152" marR="73152">
                     <a:lnL w="9525" cap="flat" cmpd="sng" algn="ctr">
                       <a:solidFill>
-                        <a:srgbClr val="F7E8C9"/>
+                        <a:srgbClr val="F6EBD5"/>
                       </a:solidFill>
                       <a:prstDash val="solid"/>
                     </a:lnL>
                     <a:lnR w="9525" cap="flat" cmpd="sng" algn="ctr">
                       <a:solidFill>
-                        <a:srgbClr val="F7E8C9"/>
+                        <a:srgbClr val="F6EBD5"/>
                       </a:solidFill>
                       <a:prstDash val="solid"/>
                     </a:lnR>
                     <a:lnT w="9525" cap="flat" cmpd="sng" algn="ctr">
                       <a:solidFill>
-                        <a:srgbClr val="F7E8C9"/>
+                        <a:srgbClr val="F6EBD5"/>
                       </a:solidFill>
                       <a:prstDash val="solid"/>
                     </a:lnT>
                     <a:lnB w="9525" cap="flat" cmpd="sng" algn="ctr">
                       <a:solidFill>
-                        <a:srgbClr val="F7E8C9"/>
+                        <a:srgbClr val="F6EBD5"/>
                       </a:solidFill>
                       <a:prstDash val="solid"/>
                     </a:lnB>
                     <a:solidFill>
-                      <a:srgbClr val="FCF7EE"/>
+                      <a:srgbClr val="FBF6EC"/>
                     </a:solidFill>
                   </a:tcPr>
                 </a:tc>
@@ -6612,7 +6887,7 @@
                       <a:r>
                         <a:rPr sz="1400" b="0">
                           <a:solidFill>
-                            <a:srgbClr val="2B2B2B"/>
+                            <a:srgbClr val="26231F"/>
                           </a:solidFill>
                         </a:rPr>
                         <a:t>□</a:t>
@@ -6622,30 +6897,30 @@
                   <a:tcPr anchor="ctr" marL="73152" marR="73152">
                     <a:lnL w="9525" cap="flat" cmpd="sng" algn="ctr">
                       <a:solidFill>
-                        <a:srgbClr val="F7E8C9"/>
+                        <a:srgbClr val="F6EBD5"/>
                       </a:solidFill>
                       <a:prstDash val="solid"/>
                     </a:lnL>
                     <a:lnR w="9525" cap="flat" cmpd="sng" algn="ctr">
                       <a:solidFill>
-                        <a:srgbClr val="F7E8C9"/>
+                        <a:srgbClr val="F6EBD5"/>
                       </a:solidFill>
                       <a:prstDash val="solid"/>
                     </a:lnR>
                     <a:lnT w="9525" cap="flat" cmpd="sng" algn="ctr">
                       <a:solidFill>
-                        <a:srgbClr val="F7E8C9"/>
+                        <a:srgbClr val="F6EBD5"/>
                       </a:solidFill>
                       <a:prstDash val="solid"/>
                     </a:lnT>
                     <a:lnB w="9525" cap="flat" cmpd="sng" algn="ctr">
                       <a:solidFill>
-                        <a:srgbClr val="F7E8C9"/>
+                        <a:srgbClr val="F6EBD5"/>
                       </a:solidFill>
                       <a:prstDash val="solid"/>
                     </a:lnB>
                     <a:solidFill>
-                      <a:srgbClr val="FCF7EE"/>
+                      <a:srgbClr val="FBF6EC"/>
                     </a:solidFill>
                   </a:tcPr>
                 </a:tc>
@@ -6658,7 +6933,7 @@
                       <a:r>
                         <a:rPr sz="1400" b="0">
                           <a:solidFill>
-                            <a:srgbClr val="2B2B2B"/>
+                            <a:srgbClr val="26231F"/>
                           </a:solidFill>
                         </a:rPr>
                         <a:t>□</a:t>
@@ -6668,30 +6943,30 @@
                   <a:tcPr anchor="ctr" marL="73152" marR="73152">
                     <a:lnL w="9525" cap="flat" cmpd="sng" algn="ctr">
                       <a:solidFill>
-                        <a:srgbClr val="F7E8C9"/>
+                        <a:srgbClr val="F6EBD5"/>
                       </a:solidFill>
                       <a:prstDash val="solid"/>
                     </a:lnL>
                     <a:lnR w="9525" cap="flat" cmpd="sng" algn="ctr">
                       <a:solidFill>
-                        <a:srgbClr val="F7E8C9"/>
+                        <a:srgbClr val="F6EBD5"/>
                       </a:solidFill>
                       <a:prstDash val="solid"/>
                     </a:lnR>
                     <a:lnT w="9525" cap="flat" cmpd="sng" algn="ctr">
                       <a:solidFill>
-                        <a:srgbClr val="F7E8C9"/>
+                        <a:srgbClr val="F6EBD5"/>
                       </a:solidFill>
                       <a:prstDash val="solid"/>
                     </a:lnT>
                     <a:lnB w="9525" cap="flat" cmpd="sng" algn="ctr">
                       <a:solidFill>
-                        <a:srgbClr val="F7E8C9"/>
+                        <a:srgbClr val="F6EBD5"/>
                       </a:solidFill>
                       <a:prstDash val="solid"/>
                     </a:lnB>
                     <a:solidFill>
-                      <a:srgbClr val="FCF7EE"/>
+                      <a:srgbClr val="FBF6EC"/>
                     </a:solidFill>
                   </a:tcPr>
                 </a:tc>
@@ -6706,7 +6981,7 @@
                       <a:r>
                         <a:rPr sz="1400" b="1">
                           <a:solidFill>
-                            <a:srgbClr val="715214"/>
+                            <a:srgbClr val="493E27"/>
                           </a:solidFill>
                         </a:rPr>
                         <a:t>암</a:t>
@@ -6716,30 +6991,30 @@
                   <a:tcPr anchor="ctr" marL="73152" marR="73152">
                     <a:lnL w="9525" cap="flat" cmpd="sng" algn="ctr">
                       <a:solidFill>
-                        <a:srgbClr val="F7E8C9"/>
+                        <a:srgbClr val="F6EBD5"/>
                       </a:solidFill>
                       <a:prstDash val="solid"/>
                     </a:lnL>
                     <a:lnR w="9525" cap="flat" cmpd="sng" algn="ctr">
                       <a:solidFill>
-                        <a:srgbClr val="F7E8C9"/>
+                        <a:srgbClr val="F6EBD5"/>
                       </a:solidFill>
                       <a:prstDash val="solid"/>
                     </a:lnR>
                     <a:lnT w="9525" cap="flat" cmpd="sng" algn="ctr">
                       <a:solidFill>
-                        <a:srgbClr val="F7E8C9"/>
+                        <a:srgbClr val="F6EBD5"/>
                       </a:solidFill>
                       <a:prstDash val="solid"/>
                     </a:lnT>
                     <a:lnB w="9525" cap="flat" cmpd="sng" algn="ctr">
                       <a:solidFill>
-                        <a:srgbClr val="F7E8C9"/>
+                        <a:srgbClr val="F6EBD5"/>
                       </a:solidFill>
                       <a:prstDash val="solid"/>
                     </a:lnB>
                     <a:solidFill>
-                      <a:srgbClr val="F7E8C9"/>
+                      <a:srgbClr val="F6EBD5"/>
                     </a:solidFill>
                   </a:tcPr>
                 </a:tc>
@@ -6752,7 +7027,7 @@
                       <a:r>
                         <a:rPr sz="1400" b="0">
                           <a:solidFill>
-                            <a:srgbClr val="2B2B2B"/>
+                            <a:srgbClr val="26231F"/>
                           </a:solidFill>
                         </a:rPr>
                         <a:t>□</a:t>
@@ -6762,25 +7037,25 @@
                   <a:tcPr anchor="ctr" marL="73152" marR="73152">
                     <a:lnL w="9525" cap="flat" cmpd="sng" algn="ctr">
                       <a:solidFill>
-                        <a:srgbClr val="F7E8C9"/>
+                        <a:srgbClr val="F6EBD5"/>
                       </a:solidFill>
                       <a:prstDash val="solid"/>
                     </a:lnL>
                     <a:lnR w="9525" cap="flat" cmpd="sng" algn="ctr">
                       <a:solidFill>
-                        <a:srgbClr val="F7E8C9"/>
+                        <a:srgbClr val="F6EBD5"/>
                       </a:solidFill>
                       <a:prstDash val="solid"/>
                     </a:lnR>
                     <a:lnT w="9525" cap="flat" cmpd="sng" algn="ctr">
                       <a:solidFill>
-                        <a:srgbClr val="F7E8C9"/>
+                        <a:srgbClr val="F6EBD5"/>
                       </a:solidFill>
                       <a:prstDash val="solid"/>
                     </a:lnT>
                     <a:lnB w="9525" cap="flat" cmpd="sng" algn="ctr">
                       <a:solidFill>
-                        <a:srgbClr val="F7E8C9"/>
+                        <a:srgbClr val="F6EBD5"/>
                       </a:solidFill>
                       <a:prstDash val="solid"/>
                     </a:lnB>
@@ -6798,7 +7073,7 @@
                       <a:r>
                         <a:rPr sz="1400" b="0">
                           <a:solidFill>
-                            <a:srgbClr val="2B2B2B"/>
+                            <a:srgbClr val="26231F"/>
                           </a:solidFill>
                         </a:rPr>
                         <a:t>□</a:t>
@@ -6808,25 +7083,25 @@
                   <a:tcPr anchor="ctr" marL="73152" marR="73152">
                     <a:lnL w="9525" cap="flat" cmpd="sng" algn="ctr">
                       <a:solidFill>
-                        <a:srgbClr val="F7E8C9"/>
+                        <a:srgbClr val="F6EBD5"/>
                       </a:solidFill>
                       <a:prstDash val="solid"/>
                     </a:lnL>
                     <a:lnR w="9525" cap="flat" cmpd="sng" algn="ctr">
                       <a:solidFill>
-                        <a:srgbClr val="F7E8C9"/>
+                        <a:srgbClr val="F6EBD5"/>
                       </a:solidFill>
                       <a:prstDash val="solid"/>
                     </a:lnR>
                     <a:lnT w="9525" cap="flat" cmpd="sng" algn="ctr">
                       <a:solidFill>
-                        <a:srgbClr val="F7E8C9"/>
+                        <a:srgbClr val="F6EBD5"/>
                       </a:solidFill>
                       <a:prstDash val="solid"/>
                     </a:lnT>
                     <a:lnB w="9525" cap="flat" cmpd="sng" algn="ctr">
                       <a:solidFill>
-                        <a:srgbClr val="F7E8C9"/>
+                        <a:srgbClr val="F6EBD5"/>
                       </a:solidFill>
                       <a:prstDash val="solid"/>
                     </a:lnB>
@@ -6844,7 +7119,7 @@
                       <a:r>
                         <a:rPr sz="1400" b="0">
                           <a:solidFill>
-                            <a:srgbClr val="2B2B2B"/>
+                            <a:srgbClr val="26231F"/>
                           </a:solidFill>
                         </a:rPr>
                         <a:t>□</a:t>
@@ -6854,25 +7129,25 @@
                   <a:tcPr anchor="ctr" marL="73152" marR="73152">
                     <a:lnL w="9525" cap="flat" cmpd="sng" algn="ctr">
                       <a:solidFill>
-                        <a:srgbClr val="F7E8C9"/>
+                        <a:srgbClr val="F6EBD5"/>
                       </a:solidFill>
                       <a:prstDash val="solid"/>
                     </a:lnL>
                     <a:lnR w="9525" cap="flat" cmpd="sng" algn="ctr">
                       <a:solidFill>
-                        <a:srgbClr val="F7E8C9"/>
+                        <a:srgbClr val="F6EBD5"/>
                       </a:solidFill>
                       <a:prstDash val="solid"/>
                     </a:lnR>
                     <a:lnT w="9525" cap="flat" cmpd="sng" algn="ctr">
                       <a:solidFill>
-                        <a:srgbClr val="F7E8C9"/>
+                        <a:srgbClr val="F6EBD5"/>
                       </a:solidFill>
                       <a:prstDash val="solid"/>
                     </a:lnT>
                     <a:lnB w="9525" cap="flat" cmpd="sng" algn="ctr">
                       <a:solidFill>
-                        <a:srgbClr val="F7E8C9"/>
+                        <a:srgbClr val="F6EBD5"/>
                       </a:solidFill>
                       <a:prstDash val="solid"/>
                     </a:lnB>
@@ -6892,7 +7167,7 @@
                       <a:r>
                         <a:rPr sz="1400" b="1">
                           <a:solidFill>
-                            <a:srgbClr val="715214"/>
+                            <a:srgbClr val="493E27"/>
                           </a:solidFill>
                         </a:rPr>
                         <a:t>뇌·심장</a:t>
@@ -6902,30 +7177,30 @@
                   <a:tcPr anchor="ctr" marL="73152" marR="73152">
                     <a:lnL w="9525" cap="flat" cmpd="sng" algn="ctr">
                       <a:solidFill>
-                        <a:srgbClr val="F7E8C9"/>
+                        <a:srgbClr val="F6EBD5"/>
                       </a:solidFill>
                       <a:prstDash val="solid"/>
                     </a:lnL>
                     <a:lnR w="9525" cap="flat" cmpd="sng" algn="ctr">
                       <a:solidFill>
-                        <a:srgbClr val="F7E8C9"/>
+                        <a:srgbClr val="F6EBD5"/>
                       </a:solidFill>
                       <a:prstDash val="solid"/>
                     </a:lnR>
                     <a:lnT w="9525" cap="flat" cmpd="sng" algn="ctr">
                       <a:solidFill>
-                        <a:srgbClr val="F7E8C9"/>
+                        <a:srgbClr val="F6EBD5"/>
                       </a:solidFill>
                       <a:prstDash val="solid"/>
                     </a:lnT>
                     <a:lnB w="9525" cap="flat" cmpd="sng" algn="ctr">
                       <a:solidFill>
-                        <a:srgbClr val="F7E8C9"/>
+                        <a:srgbClr val="F6EBD5"/>
                       </a:solidFill>
                       <a:prstDash val="solid"/>
                     </a:lnB>
                     <a:solidFill>
-                      <a:srgbClr val="F7E8C9"/>
+                      <a:srgbClr val="F6EBD5"/>
                     </a:solidFill>
                   </a:tcPr>
                 </a:tc>
@@ -6938,7 +7213,7 @@
                       <a:r>
                         <a:rPr sz="1400" b="0">
                           <a:solidFill>
-                            <a:srgbClr val="2B2B2B"/>
+                            <a:srgbClr val="26231F"/>
                           </a:solidFill>
                         </a:rPr>
                         <a:t>□</a:t>
@@ -6948,30 +7223,30 @@
                   <a:tcPr anchor="ctr" marL="73152" marR="73152">
                     <a:lnL w="9525" cap="flat" cmpd="sng" algn="ctr">
                       <a:solidFill>
-                        <a:srgbClr val="F7E8C9"/>
+                        <a:srgbClr val="F6EBD5"/>
                       </a:solidFill>
                       <a:prstDash val="solid"/>
                     </a:lnL>
                     <a:lnR w="9525" cap="flat" cmpd="sng" algn="ctr">
                       <a:solidFill>
-                        <a:srgbClr val="F7E8C9"/>
+                        <a:srgbClr val="F6EBD5"/>
                       </a:solidFill>
                       <a:prstDash val="solid"/>
                     </a:lnR>
                     <a:lnT w="9525" cap="flat" cmpd="sng" algn="ctr">
                       <a:solidFill>
-                        <a:srgbClr val="F7E8C9"/>
+                        <a:srgbClr val="F6EBD5"/>
                       </a:solidFill>
                       <a:prstDash val="solid"/>
                     </a:lnT>
                     <a:lnB w="9525" cap="flat" cmpd="sng" algn="ctr">
                       <a:solidFill>
-                        <a:srgbClr val="F7E8C9"/>
+                        <a:srgbClr val="F6EBD5"/>
                       </a:solidFill>
                       <a:prstDash val="solid"/>
                     </a:lnB>
                     <a:solidFill>
-                      <a:srgbClr val="FCF7EE"/>
+                      <a:srgbClr val="FBF6EC"/>
                     </a:solidFill>
                   </a:tcPr>
                 </a:tc>
@@ -6984,7 +7259,7 @@
                       <a:r>
                         <a:rPr sz="1400" b="0">
                           <a:solidFill>
-                            <a:srgbClr val="2B2B2B"/>
+                            <a:srgbClr val="26231F"/>
                           </a:solidFill>
                         </a:rPr>
                         <a:t>□</a:t>
@@ -6994,30 +7269,30 @@
                   <a:tcPr anchor="ctr" marL="73152" marR="73152">
                     <a:lnL w="9525" cap="flat" cmpd="sng" algn="ctr">
                       <a:solidFill>
-                        <a:srgbClr val="F7E8C9"/>
+                        <a:srgbClr val="F6EBD5"/>
                       </a:solidFill>
                       <a:prstDash val="solid"/>
                     </a:lnL>
                     <a:lnR w="9525" cap="flat" cmpd="sng" algn="ctr">
                       <a:solidFill>
-                        <a:srgbClr val="F7E8C9"/>
+                        <a:srgbClr val="F6EBD5"/>
                       </a:solidFill>
                       <a:prstDash val="solid"/>
                     </a:lnR>
                     <a:lnT w="9525" cap="flat" cmpd="sng" algn="ctr">
                       <a:solidFill>
-                        <a:srgbClr val="F7E8C9"/>
+                        <a:srgbClr val="F6EBD5"/>
                       </a:solidFill>
                       <a:prstDash val="solid"/>
                     </a:lnT>
                     <a:lnB w="9525" cap="flat" cmpd="sng" algn="ctr">
                       <a:solidFill>
-                        <a:srgbClr val="F7E8C9"/>
+                        <a:srgbClr val="F6EBD5"/>
                       </a:solidFill>
                       <a:prstDash val="solid"/>
                     </a:lnB>
                     <a:solidFill>
-                      <a:srgbClr val="FCF7EE"/>
+                      <a:srgbClr val="FBF6EC"/>
                     </a:solidFill>
                   </a:tcPr>
                 </a:tc>
@@ -7030,7 +7305,7 @@
                       <a:r>
                         <a:rPr sz="1400" b="0">
                           <a:solidFill>
-                            <a:srgbClr val="2B2B2B"/>
+                            <a:srgbClr val="26231F"/>
                           </a:solidFill>
                         </a:rPr>
                         <a:t>□</a:t>
@@ -7040,30 +7315,30 @@
                   <a:tcPr anchor="ctr" marL="73152" marR="73152">
                     <a:lnL w="9525" cap="flat" cmpd="sng" algn="ctr">
                       <a:solidFill>
-                        <a:srgbClr val="F7E8C9"/>
+                        <a:srgbClr val="F6EBD5"/>
                       </a:solidFill>
                       <a:prstDash val="solid"/>
                     </a:lnL>
                     <a:lnR w="9525" cap="flat" cmpd="sng" algn="ctr">
                       <a:solidFill>
-                        <a:srgbClr val="F7E8C9"/>
+                        <a:srgbClr val="F6EBD5"/>
                       </a:solidFill>
                       <a:prstDash val="solid"/>
                     </a:lnR>
                     <a:lnT w="9525" cap="flat" cmpd="sng" algn="ctr">
                       <a:solidFill>
-                        <a:srgbClr val="F7E8C9"/>
+                        <a:srgbClr val="F6EBD5"/>
                       </a:solidFill>
                       <a:prstDash val="solid"/>
                     </a:lnT>
                     <a:lnB w="9525" cap="flat" cmpd="sng" algn="ctr">
                       <a:solidFill>
-                        <a:srgbClr val="F7E8C9"/>
+                        <a:srgbClr val="F6EBD5"/>
                       </a:solidFill>
                       <a:prstDash val="solid"/>
                     </a:lnB>
                     <a:solidFill>
-                      <a:srgbClr val="FCF7EE"/>
+                      <a:srgbClr val="FBF6EC"/>
                     </a:solidFill>
                   </a:tcPr>
                 </a:tc>
@@ -7078,7 +7353,7 @@
                       <a:r>
                         <a:rPr sz="1400" b="1">
                           <a:solidFill>
-                            <a:srgbClr val="715214"/>
+                            <a:srgbClr val="493E27"/>
                           </a:solidFill>
                         </a:rPr>
                         <a:t>입원·수술</a:t>
@@ -7088,30 +7363,30 @@
                   <a:tcPr anchor="ctr" marL="73152" marR="73152">
                     <a:lnL w="9525" cap="flat" cmpd="sng" algn="ctr">
                       <a:solidFill>
-                        <a:srgbClr val="F7E8C9"/>
+                        <a:srgbClr val="F6EBD5"/>
                       </a:solidFill>
                       <a:prstDash val="solid"/>
                     </a:lnL>
                     <a:lnR w="9525" cap="flat" cmpd="sng" algn="ctr">
                       <a:solidFill>
-                        <a:srgbClr val="F7E8C9"/>
+                        <a:srgbClr val="F6EBD5"/>
                       </a:solidFill>
                       <a:prstDash val="solid"/>
                     </a:lnR>
                     <a:lnT w="9525" cap="flat" cmpd="sng" algn="ctr">
                       <a:solidFill>
-                        <a:srgbClr val="F7E8C9"/>
+                        <a:srgbClr val="F6EBD5"/>
                       </a:solidFill>
                       <a:prstDash val="solid"/>
                     </a:lnT>
                     <a:lnB w="9525" cap="flat" cmpd="sng" algn="ctr">
                       <a:solidFill>
-                        <a:srgbClr val="F7E8C9"/>
+                        <a:srgbClr val="F6EBD5"/>
                       </a:solidFill>
                       <a:prstDash val="solid"/>
                     </a:lnB>
                     <a:solidFill>
-                      <a:srgbClr val="F7E8C9"/>
+                      <a:srgbClr val="F6EBD5"/>
                     </a:solidFill>
                   </a:tcPr>
                 </a:tc>
@@ -7124,7 +7399,7 @@
                       <a:r>
                         <a:rPr sz="1400" b="0">
                           <a:solidFill>
-                            <a:srgbClr val="2B2B2B"/>
+                            <a:srgbClr val="26231F"/>
                           </a:solidFill>
                         </a:rPr>
                         <a:t>□</a:t>
@@ -7134,25 +7409,25 @@
                   <a:tcPr anchor="ctr" marL="73152" marR="73152">
                     <a:lnL w="9525" cap="flat" cmpd="sng" algn="ctr">
                       <a:solidFill>
-                        <a:srgbClr val="F7E8C9"/>
+                        <a:srgbClr val="F6EBD5"/>
                       </a:solidFill>
                       <a:prstDash val="solid"/>
                     </a:lnL>
                     <a:lnR w="9525" cap="flat" cmpd="sng" algn="ctr">
                       <a:solidFill>
-                        <a:srgbClr val="F7E8C9"/>
+                        <a:srgbClr val="F6EBD5"/>
                       </a:solidFill>
                       <a:prstDash val="solid"/>
                     </a:lnR>
                     <a:lnT w="9525" cap="flat" cmpd="sng" algn="ctr">
                       <a:solidFill>
-                        <a:srgbClr val="F7E8C9"/>
+                        <a:srgbClr val="F6EBD5"/>
                       </a:solidFill>
                       <a:prstDash val="solid"/>
                     </a:lnT>
                     <a:lnB w="9525" cap="flat" cmpd="sng" algn="ctr">
                       <a:solidFill>
-                        <a:srgbClr val="F7E8C9"/>
+                        <a:srgbClr val="F6EBD5"/>
                       </a:solidFill>
                       <a:prstDash val="solid"/>
                     </a:lnB>
@@ -7170,7 +7445,7 @@
                       <a:r>
                         <a:rPr sz="1400" b="0">
                           <a:solidFill>
-                            <a:srgbClr val="2B2B2B"/>
+                            <a:srgbClr val="26231F"/>
                           </a:solidFill>
                         </a:rPr>
                         <a:t>□</a:t>
@@ -7180,25 +7455,25 @@
                   <a:tcPr anchor="ctr" marL="73152" marR="73152">
                     <a:lnL w="9525" cap="flat" cmpd="sng" algn="ctr">
                       <a:solidFill>
-                        <a:srgbClr val="F7E8C9"/>
+                        <a:srgbClr val="F6EBD5"/>
                       </a:solidFill>
                       <a:prstDash val="solid"/>
                     </a:lnL>
                     <a:lnR w="9525" cap="flat" cmpd="sng" algn="ctr">
                       <a:solidFill>
-                        <a:srgbClr val="F7E8C9"/>
+                        <a:srgbClr val="F6EBD5"/>
                       </a:solidFill>
                       <a:prstDash val="solid"/>
                     </a:lnR>
                     <a:lnT w="9525" cap="flat" cmpd="sng" algn="ctr">
                       <a:solidFill>
-                        <a:srgbClr val="F7E8C9"/>
+                        <a:srgbClr val="F6EBD5"/>
                       </a:solidFill>
                       <a:prstDash val="solid"/>
                     </a:lnT>
                     <a:lnB w="9525" cap="flat" cmpd="sng" algn="ctr">
                       <a:solidFill>
-                        <a:srgbClr val="F7E8C9"/>
+                        <a:srgbClr val="F6EBD5"/>
                       </a:solidFill>
                       <a:prstDash val="solid"/>
                     </a:lnB>
@@ -7216,7 +7491,7 @@
                       <a:r>
                         <a:rPr sz="1400" b="0">
                           <a:solidFill>
-                            <a:srgbClr val="2B2B2B"/>
+                            <a:srgbClr val="26231F"/>
                           </a:solidFill>
                         </a:rPr>
                         <a:t>□</a:t>
@@ -7226,25 +7501,25 @@
                   <a:tcPr anchor="ctr" marL="73152" marR="73152">
                     <a:lnL w="9525" cap="flat" cmpd="sng" algn="ctr">
                       <a:solidFill>
-                        <a:srgbClr val="F7E8C9"/>
+                        <a:srgbClr val="F6EBD5"/>
                       </a:solidFill>
                       <a:prstDash val="solid"/>
                     </a:lnL>
                     <a:lnR w="9525" cap="flat" cmpd="sng" algn="ctr">
                       <a:solidFill>
-                        <a:srgbClr val="F7E8C9"/>
+                        <a:srgbClr val="F6EBD5"/>
                       </a:solidFill>
                       <a:prstDash val="solid"/>
                     </a:lnR>
                     <a:lnT w="9525" cap="flat" cmpd="sng" algn="ctr">
                       <a:solidFill>
-                        <a:srgbClr val="F7E8C9"/>
+                        <a:srgbClr val="F6EBD5"/>
                       </a:solidFill>
                       <a:prstDash val="solid"/>
                     </a:lnT>
                     <a:lnB w="9525" cap="flat" cmpd="sng" algn="ctr">
                       <a:solidFill>
-                        <a:srgbClr val="F7E8C9"/>
+                        <a:srgbClr val="F6EBD5"/>
                       </a:solidFill>
                       <a:prstDash val="solid"/>
                     </a:lnB>
@@ -7264,7 +7539,7 @@
                       <a:r>
                         <a:rPr sz="1400" b="1">
                           <a:solidFill>
-                            <a:srgbClr val="715214"/>
+                            <a:srgbClr val="493E27"/>
                           </a:solidFill>
                         </a:rPr>
                         <a:t>상해</a:t>
@@ -7274,30 +7549,30 @@
                   <a:tcPr anchor="ctr" marL="73152" marR="73152">
                     <a:lnL w="9525" cap="flat" cmpd="sng" algn="ctr">
                       <a:solidFill>
-                        <a:srgbClr val="F7E8C9"/>
+                        <a:srgbClr val="F6EBD5"/>
                       </a:solidFill>
                       <a:prstDash val="solid"/>
                     </a:lnL>
                     <a:lnR w="9525" cap="flat" cmpd="sng" algn="ctr">
                       <a:solidFill>
-                        <a:srgbClr val="F7E8C9"/>
+                        <a:srgbClr val="F6EBD5"/>
                       </a:solidFill>
                       <a:prstDash val="solid"/>
                     </a:lnR>
                     <a:lnT w="9525" cap="flat" cmpd="sng" algn="ctr">
                       <a:solidFill>
-                        <a:srgbClr val="F7E8C9"/>
+                        <a:srgbClr val="F6EBD5"/>
                       </a:solidFill>
                       <a:prstDash val="solid"/>
                     </a:lnT>
                     <a:lnB w="9525" cap="flat" cmpd="sng" algn="ctr">
                       <a:solidFill>
-                        <a:srgbClr val="F7E8C9"/>
+                        <a:srgbClr val="F6EBD5"/>
                       </a:solidFill>
                       <a:prstDash val="solid"/>
                     </a:lnB>
                     <a:solidFill>
-                      <a:srgbClr val="F7E8C9"/>
+                      <a:srgbClr val="F6EBD5"/>
                     </a:solidFill>
                   </a:tcPr>
                 </a:tc>
@@ -7310,7 +7585,7 @@
                       <a:r>
                         <a:rPr sz="1400" b="0">
                           <a:solidFill>
-                            <a:srgbClr val="2B2B2B"/>
+                            <a:srgbClr val="26231F"/>
                           </a:solidFill>
                         </a:rPr>
                         <a:t>□</a:t>
@@ -7320,30 +7595,30 @@
                   <a:tcPr anchor="ctr" marL="73152" marR="73152">
                     <a:lnL w="9525" cap="flat" cmpd="sng" algn="ctr">
                       <a:solidFill>
-                        <a:srgbClr val="F7E8C9"/>
+                        <a:srgbClr val="F6EBD5"/>
                       </a:solidFill>
                       <a:prstDash val="solid"/>
                     </a:lnL>
                     <a:lnR w="9525" cap="flat" cmpd="sng" algn="ctr">
                       <a:solidFill>
-                        <a:srgbClr val="F7E8C9"/>
+                        <a:srgbClr val="F6EBD5"/>
                       </a:solidFill>
                       <a:prstDash val="solid"/>
                     </a:lnR>
                     <a:lnT w="9525" cap="flat" cmpd="sng" algn="ctr">
                       <a:solidFill>
-                        <a:srgbClr val="F7E8C9"/>
+                        <a:srgbClr val="F6EBD5"/>
                       </a:solidFill>
                       <a:prstDash val="solid"/>
                     </a:lnT>
                     <a:lnB w="9525" cap="flat" cmpd="sng" algn="ctr">
                       <a:solidFill>
-                        <a:srgbClr val="F7E8C9"/>
+                        <a:srgbClr val="F6EBD5"/>
                       </a:solidFill>
                       <a:prstDash val="solid"/>
                     </a:lnB>
                     <a:solidFill>
-                      <a:srgbClr val="FCF7EE"/>
+                      <a:srgbClr val="FBF6EC"/>
                     </a:solidFill>
                   </a:tcPr>
                 </a:tc>
@@ -7356,7 +7631,7 @@
                       <a:r>
                         <a:rPr sz="1400" b="0">
                           <a:solidFill>
-                            <a:srgbClr val="2B2B2B"/>
+                            <a:srgbClr val="26231F"/>
                           </a:solidFill>
                         </a:rPr>
                         <a:t>□</a:t>
@@ -7366,30 +7641,30 @@
                   <a:tcPr anchor="ctr" marL="73152" marR="73152">
                     <a:lnL w="9525" cap="flat" cmpd="sng" algn="ctr">
                       <a:solidFill>
-                        <a:srgbClr val="F7E8C9"/>
+                        <a:srgbClr val="F6EBD5"/>
                       </a:solidFill>
                       <a:prstDash val="solid"/>
                     </a:lnL>
                     <a:lnR w="9525" cap="flat" cmpd="sng" algn="ctr">
                       <a:solidFill>
-                        <a:srgbClr val="F7E8C9"/>
+                        <a:srgbClr val="F6EBD5"/>
                       </a:solidFill>
                       <a:prstDash val="solid"/>
                     </a:lnR>
                     <a:lnT w="9525" cap="flat" cmpd="sng" algn="ctr">
                       <a:solidFill>
-                        <a:srgbClr val="F7E8C9"/>
+                        <a:srgbClr val="F6EBD5"/>
                       </a:solidFill>
                       <a:prstDash val="solid"/>
                     </a:lnT>
                     <a:lnB w="9525" cap="flat" cmpd="sng" algn="ctr">
                       <a:solidFill>
-                        <a:srgbClr val="F7E8C9"/>
+                        <a:srgbClr val="F6EBD5"/>
                       </a:solidFill>
                       <a:prstDash val="solid"/>
                     </a:lnB>
                     <a:solidFill>
-                      <a:srgbClr val="FCF7EE"/>
+                      <a:srgbClr val="FBF6EC"/>
                     </a:solidFill>
                   </a:tcPr>
                 </a:tc>
@@ -7402,7 +7677,7 @@
                       <a:r>
                         <a:rPr sz="1400" b="0">
                           <a:solidFill>
-                            <a:srgbClr val="2B2B2B"/>
+                            <a:srgbClr val="26231F"/>
                           </a:solidFill>
                         </a:rPr>
                         <a:t>□</a:t>
@@ -7412,30 +7687,30 @@
                   <a:tcPr anchor="ctr" marL="73152" marR="73152">
                     <a:lnL w="9525" cap="flat" cmpd="sng" algn="ctr">
                       <a:solidFill>
-                        <a:srgbClr val="F7E8C9"/>
+                        <a:srgbClr val="F6EBD5"/>
                       </a:solidFill>
                       <a:prstDash val="solid"/>
                     </a:lnL>
                     <a:lnR w="9525" cap="flat" cmpd="sng" algn="ctr">
                       <a:solidFill>
-                        <a:srgbClr val="F7E8C9"/>
+                        <a:srgbClr val="F6EBD5"/>
                       </a:solidFill>
                       <a:prstDash val="solid"/>
                     </a:lnR>
                     <a:lnT w="9525" cap="flat" cmpd="sng" algn="ctr">
                       <a:solidFill>
-                        <a:srgbClr val="F7E8C9"/>
+                        <a:srgbClr val="F6EBD5"/>
                       </a:solidFill>
                       <a:prstDash val="solid"/>
                     </a:lnT>
                     <a:lnB w="9525" cap="flat" cmpd="sng" algn="ctr">
                       <a:solidFill>
-                        <a:srgbClr val="F7E8C9"/>
+                        <a:srgbClr val="F6EBD5"/>
                       </a:solidFill>
                       <a:prstDash val="solid"/>
                     </a:lnB>
                     <a:solidFill>
-                      <a:srgbClr val="FCF7EE"/>
+                      <a:srgbClr val="FBF6EC"/>
                     </a:solidFill>
                   </a:tcPr>
                 </a:tc>
@@ -7450,7 +7725,7 @@
                       <a:r>
                         <a:rPr sz="1400" b="1">
                           <a:solidFill>
-                            <a:srgbClr val="715214"/>
+                            <a:srgbClr val="493E27"/>
                           </a:solidFill>
                         </a:rPr>
                         <a:t>실손의료</a:t>
@@ -7460,30 +7735,30 @@
                   <a:tcPr anchor="ctr" marL="73152" marR="73152">
                     <a:lnL w="9525" cap="flat" cmpd="sng" algn="ctr">
                       <a:solidFill>
-                        <a:srgbClr val="F7E8C9"/>
+                        <a:srgbClr val="F6EBD5"/>
                       </a:solidFill>
                       <a:prstDash val="solid"/>
                     </a:lnL>
                     <a:lnR w="9525" cap="flat" cmpd="sng" algn="ctr">
                       <a:solidFill>
-                        <a:srgbClr val="F7E8C9"/>
+                        <a:srgbClr val="F6EBD5"/>
                       </a:solidFill>
                       <a:prstDash val="solid"/>
                     </a:lnR>
                     <a:lnT w="9525" cap="flat" cmpd="sng" algn="ctr">
                       <a:solidFill>
-                        <a:srgbClr val="F7E8C9"/>
+                        <a:srgbClr val="F6EBD5"/>
                       </a:solidFill>
                       <a:prstDash val="solid"/>
                     </a:lnT>
                     <a:lnB w="9525" cap="flat" cmpd="sng" algn="ctr">
                       <a:solidFill>
-                        <a:srgbClr val="F7E8C9"/>
+                        <a:srgbClr val="F6EBD5"/>
                       </a:solidFill>
                       <a:prstDash val="solid"/>
                     </a:lnB>
                     <a:solidFill>
-                      <a:srgbClr val="F7E8C9"/>
+                      <a:srgbClr val="F6EBD5"/>
                     </a:solidFill>
                   </a:tcPr>
                 </a:tc>
@@ -7496,7 +7771,7 @@
                       <a:r>
                         <a:rPr sz="1400" b="0">
                           <a:solidFill>
-                            <a:srgbClr val="2B2B2B"/>
+                            <a:srgbClr val="26231F"/>
                           </a:solidFill>
                         </a:rPr>
                         <a:t>□</a:t>
@@ -7506,25 +7781,25 @@
                   <a:tcPr anchor="ctr" marL="73152" marR="73152">
                     <a:lnL w="9525" cap="flat" cmpd="sng" algn="ctr">
                       <a:solidFill>
-                        <a:srgbClr val="F7E8C9"/>
+                        <a:srgbClr val="F6EBD5"/>
                       </a:solidFill>
                       <a:prstDash val="solid"/>
                     </a:lnL>
                     <a:lnR w="9525" cap="flat" cmpd="sng" algn="ctr">
                       <a:solidFill>
-                        <a:srgbClr val="F7E8C9"/>
+                        <a:srgbClr val="F6EBD5"/>
                       </a:solidFill>
                       <a:prstDash val="solid"/>
                     </a:lnR>
                     <a:lnT w="9525" cap="flat" cmpd="sng" algn="ctr">
                       <a:solidFill>
-                        <a:srgbClr val="F7E8C9"/>
+                        <a:srgbClr val="F6EBD5"/>
                       </a:solidFill>
                       <a:prstDash val="solid"/>
                     </a:lnT>
                     <a:lnB w="9525" cap="flat" cmpd="sng" algn="ctr">
                       <a:solidFill>
-                        <a:srgbClr val="F7E8C9"/>
+                        <a:srgbClr val="F6EBD5"/>
                       </a:solidFill>
                       <a:prstDash val="solid"/>
                     </a:lnB>
@@ -7542,7 +7817,7 @@
                       <a:r>
                         <a:rPr sz="1400" b="0">
                           <a:solidFill>
-                            <a:srgbClr val="2B2B2B"/>
+                            <a:srgbClr val="26231F"/>
                           </a:solidFill>
                         </a:rPr>
                         <a:t>□</a:t>
@@ -7552,25 +7827,25 @@
                   <a:tcPr anchor="ctr" marL="73152" marR="73152">
                     <a:lnL w="9525" cap="flat" cmpd="sng" algn="ctr">
                       <a:solidFill>
-                        <a:srgbClr val="F7E8C9"/>
+                        <a:srgbClr val="F6EBD5"/>
                       </a:solidFill>
                       <a:prstDash val="solid"/>
                     </a:lnL>
                     <a:lnR w="9525" cap="flat" cmpd="sng" algn="ctr">
                       <a:solidFill>
-                        <a:srgbClr val="F7E8C9"/>
+                        <a:srgbClr val="F6EBD5"/>
                       </a:solidFill>
                       <a:prstDash val="solid"/>
                     </a:lnR>
                     <a:lnT w="9525" cap="flat" cmpd="sng" algn="ctr">
                       <a:solidFill>
-                        <a:srgbClr val="F7E8C9"/>
+                        <a:srgbClr val="F6EBD5"/>
                       </a:solidFill>
                       <a:prstDash val="solid"/>
                     </a:lnT>
                     <a:lnB w="9525" cap="flat" cmpd="sng" algn="ctr">
                       <a:solidFill>
-                        <a:srgbClr val="F7E8C9"/>
+                        <a:srgbClr val="F6EBD5"/>
                       </a:solidFill>
                       <a:prstDash val="solid"/>
                     </a:lnB>
@@ -7588,7 +7863,7 @@
                       <a:r>
                         <a:rPr sz="1400" b="0">
                           <a:solidFill>
-                            <a:srgbClr val="2B2B2B"/>
+                            <a:srgbClr val="26231F"/>
                           </a:solidFill>
                         </a:rPr>
                         <a:t>□</a:t>
@@ -7598,25 +7873,25 @@
                   <a:tcPr anchor="ctr" marL="73152" marR="73152">
                     <a:lnL w="9525" cap="flat" cmpd="sng" algn="ctr">
                       <a:solidFill>
-                        <a:srgbClr val="F7E8C9"/>
+                        <a:srgbClr val="F6EBD5"/>
                       </a:solidFill>
                       <a:prstDash val="solid"/>
                     </a:lnL>
                     <a:lnR w="9525" cap="flat" cmpd="sng" algn="ctr">
                       <a:solidFill>
-                        <a:srgbClr val="F7E8C9"/>
+                        <a:srgbClr val="F6EBD5"/>
                       </a:solidFill>
                       <a:prstDash val="solid"/>
                     </a:lnR>
                     <a:lnT w="9525" cap="flat" cmpd="sng" algn="ctr">
                       <a:solidFill>
-                        <a:srgbClr val="F7E8C9"/>
+                        <a:srgbClr val="F6EBD5"/>
                       </a:solidFill>
                       <a:prstDash val="solid"/>
                     </a:lnT>
                     <a:lnB w="9525" cap="flat" cmpd="sng" algn="ctr">
                       <a:solidFill>
-                        <a:srgbClr val="F7E8C9"/>
+                        <a:srgbClr val="F6EBD5"/>
                       </a:solidFill>
                       <a:prstDash val="solid"/>
                     </a:lnB>
@@ -7636,7 +7911,7 @@
                       <a:r>
                         <a:rPr sz="1400" b="1">
                           <a:solidFill>
-                            <a:srgbClr val="715214"/>
+                            <a:srgbClr val="493E27"/>
                           </a:solidFill>
                         </a:rPr>
                         <a:t>연금·노후자금</a:t>
@@ -7646,30 +7921,30 @@
                   <a:tcPr anchor="ctr" marL="73152" marR="73152">
                     <a:lnL w="9525" cap="flat" cmpd="sng" algn="ctr">
                       <a:solidFill>
-                        <a:srgbClr val="F7E8C9"/>
+                        <a:srgbClr val="F6EBD5"/>
                       </a:solidFill>
                       <a:prstDash val="solid"/>
                     </a:lnL>
                     <a:lnR w="9525" cap="flat" cmpd="sng" algn="ctr">
                       <a:solidFill>
-                        <a:srgbClr val="F7E8C9"/>
+                        <a:srgbClr val="F6EBD5"/>
                       </a:solidFill>
                       <a:prstDash val="solid"/>
                     </a:lnR>
                     <a:lnT w="9525" cap="flat" cmpd="sng" algn="ctr">
                       <a:solidFill>
-                        <a:srgbClr val="F7E8C9"/>
+                        <a:srgbClr val="F6EBD5"/>
                       </a:solidFill>
                       <a:prstDash val="solid"/>
                     </a:lnT>
                     <a:lnB w="9525" cap="flat" cmpd="sng" algn="ctr">
                       <a:solidFill>
-                        <a:srgbClr val="F7E8C9"/>
+                        <a:srgbClr val="F6EBD5"/>
                       </a:solidFill>
                       <a:prstDash val="solid"/>
                     </a:lnB>
                     <a:solidFill>
-                      <a:srgbClr val="F7E8C9"/>
+                      <a:srgbClr val="F6EBD5"/>
                     </a:solidFill>
                   </a:tcPr>
                 </a:tc>
@@ -7682,7 +7957,7 @@
                       <a:r>
                         <a:rPr sz="1400" b="0">
                           <a:solidFill>
-                            <a:srgbClr val="2B2B2B"/>
+                            <a:srgbClr val="26231F"/>
                           </a:solidFill>
                         </a:rPr>
                         <a:t>□</a:t>
@@ -7692,30 +7967,30 @@
                   <a:tcPr anchor="ctr" marL="73152" marR="73152">
                     <a:lnL w="9525" cap="flat" cmpd="sng" algn="ctr">
                       <a:solidFill>
-                        <a:srgbClr val="F7E8C9"/>
+                        <a:srgbClr val="F6EBD5"/>
                       </a:solidFill>
                       <a:prstDash val="solid"/>
                     </a:lnL>
                     <a:lnR w="9525" cap="flat" cmpd="sng" algn="ctr">
                       <a:solidFill>
-                        <a:srgbClr val="F7E8C9"/>
+                        <a:srgbClr val="F6EBD5"/>
                       </a:solidFill>
                       <a:prstDash val="solid"/>
                     </a:lnR>
                     <a:lnT w="9525" cap="flat" cmpd="sng" algn="ctr">
                       <a:solidFill>
-                        <a:srgbClr val="F7E8C9"/>
+                        <a:srgbClr val="F6EBD5"/>
                       </a:solidFill>
                       <a:prstDash val="solid"/>
                     </a:lnT>
                     <a:lnB w="9525" cap="flat" cmpd="sng" algn="ctr">
                       <a:solidFill>
-                        <a:srgbClr val="F7E8C9"/>
+                        <a:srgbClr val="F6EBD5"/>
                       </a:solidFill>
                       <a:prstDash val="solid"/>
                     </a:lnB>
                     <a:solidFill>
-                      <a:srgbClr val="FCF7EE"/>
+                      <a:srgbClr val="FBF6EC"/>
                     </a:solidFill>
                   </a:tcPr>
                 </a:tc>
@@ -7728,7 +8003,7 @@
                       <a:r>
                         <a:rPr sz="1400" b="0">
                           <a:solidFill>
-                            <a:srgbClr val="2B2B2B"/>
+                            <a:srgbClr val="26231F"/>
                           </a:solidFill>
                         </a:rPr>
                         <a:t>□</a:t>
@@ -7738,30 +8013,30 @@
                   <a:tcPr anchor="ctr" marL="73152" marR="73152">
                     <a:lnL w="9525" cap="flat" cmpd="sng" algn="ctr">
                       <a:solidFill>
-                        <a:srgbClr val="F7E8C9"/>
+                        <a:srgbClr val="F6EBD5"/>
                       </a:solidFill>
                       <a:prstDash val="solid"/>
                     </a:lnL>
                     <a:lnR w="9525" cap="flat" cmpd="sng" algn="ctr">
                       <a:solidFill>
-                        <a:srgbClr val="F7E8C9"/>
+                        <a:srgbClr val="F6EBD5"/>
                       </a:solidFill>
                       <a:prstDash val="solid"/>
                     </a:lnR>
                     <a:lnT w="9525" cap="flat" cmpd="sng" algn="ctr">
                       <a:solidFill>
-                        <a:srgbClr val="F7E8C9"/>
+                        <a:srgbClr val="F6EBD5"/>
                       </a:solidFill>
                       <a:prstDash val="solid"/>
                     </a:lnT>
                     <a:lnB w="9525" cap="flat" cmpd="sng" algn="ctr">
                       <a:solidFill>
-                        <a:srgbClr val="F7E8C9"/>
+                        <a:srgbClr val="F6EBD5"/>
                       </a:solidFill>
                       <a:prstDash val="solid"/>
                     </a:lnB>
                     <a:solidFill>
-                      <a:srgbClr val="FCF7EE"/>
+                      <a:srgbClr val="FBF6EC"/>
                     </a:solidFill>
                   </a:tcPr>
                 </a:tc>
@@ -7774,7 +8049,7 @@
                       <a:r>
                         <a:rPr sz="1400" b="0">
                           <a:solidFill>
-                            <a:srgbClr val="2B2B2B"/>
+                            <a:srgbClr val="26231F"/>
                           </a:solidFill>
                         </a:rPr>
                         <a:t>□</a:t>
@@ -7784,30 +8059,30 @@
                   <a:tcPr anchor="ctr" marL="73152" marR="73152">
                     <a:lnL w="9525" cap="flat" cmpd="sng" algn="ctr">
                       <a:solidFill>
-                        <a:srgbClr val="F7E8C9"/>
+                        <a:srgbClr val="F6EBD5"/>
                       </a:solidFill>
                       <a:prstDash val="solid"/>
                     </a:lnL>
                     <a:lnR w="9525" cap="flat" cmpd="sng" algn="ctr">
                       <a:solidFill>
-                        <a:srgbClr val="F7E8C9"/>
+                        <a:srgbClr val="F6EBD5"/>
                       </a:solidFill>
                       <a:prstDash val="solid"/>
                     </a:lnR>
                     <a:lnT w="9525" cap="flat" cmpd="sng" algn="ctr">
                       <a:solidFill>
-                        <a:srgbClr val="F7E8C9"/>
+                        <a:srgbClr val="F6EBD5"/>
                       </a:solidFill>
                       <a:prstDash val="solid"/>
                     </a:lnT>
                     <a:lnB w="9525" cap="flat" cmpd="sng" algn="ctr">
                       <a:solidFill>
-                        <a:srgbClr val="F7E8C9"/>
+                        <a:srgbClr val="F6EBD5"/>
                       </a:solidFill>
                       <a:prstDash val="solid"/>
                     </a:lnB>
                     <a:solidFill>
-                      <a:srgbClr val="FCF7EE"/>
+                      <a:srgbClr val="FBF6EC"/>
                     </a:solidFill>
                   </a:tcPr>
                 </a:tc>
@@ -7830,7 +8105,7 @@
     <p:bg>
       <p:bgPr>
         <a:solidFill>
-          <a:srgbClr val="F7E8C9"/>
+          <a:srgbClr val="FFFFFF"/>
         </a:solidFill>
         <a:effectLst/>
       </p:bgPr>
@@ -7850,20 +8125,84 @@
         </p:nvSpPr>
         <p:spPr>
           <a:xfrm>
-            <a:off x="274320" y="274320"/>
-            <a:ext cx="11643055" cy="6309360"/>
+            <a:off x="640080" y="566928"/>
+            <a:ext cx="10911535" cy="10972"/>
           </a:xfrm>
           <a:prstGeom prst="rect">
             <a:avLst/>
           </a:prstGeom>
           <a:solidFill>
-            <a:srgbClr val="FFFFFF"/>
+            <a:srgbClr val="26231F"/>
           </a:solidFill>
-          <a:ln w="25400">
-            <a:solidFill>
-              <a:srgbClr val="C79123"/>
-            </a:solidFill>
-            <a:prstDash val="dash"/>
+          <a:ln>
+            <a:noFill/>
+          </a:ln>
+        </p:spPr>
+        <p:txBody>
+          <a:bodyPr rtlCol="0" anchor="ctr"/>
+          <a:lstStyle/>
+          <a:p>
+            <a:pPr algn="ctr"/>
+          </a:p>
+        </p:txBody>
+      </p:sp>
+      <p:sp>
+        <p:nvSpPr>
+          <p:cNvPr id="4" name="상단 라벨"/>
+          <p:cNvSpPr txBox="1"/>
+          <p:nvPr/>
+        </p:nvSpPr>
+        <p:spPr>
+          <a:xfrm>
+            <a:off x="640080" y="237744"/>
+            <a:ext cx="5486400" cy="274320"/>
+          </a:xfrm>
+          <a:prstGeom prst="rect">
+            <a:avLst/>
+          </a:prstGeom>
+          <a:noFill/>
+        </p:spPr>
+        <p:txBody>
+          <a:bodyPr wrap="square" lIns="54864" rIns="54864" tIns="27432" bIns="27432" anchor="ctr">
+            <a:noAutofit/>
+          </a:bodyPr>
+          <a:lstStyle/>
+          <a:p>
+            <a:pPr algn="l">
+              <a:lnSpc>
+                <a:spcPct val="115000"/>
+              </a:lnSpc>
+            </a:pPr>
+            <a:r>
+              <a:rPr sz="900" b="1" i="0" spc="250">
+                <a:solidFill>
+                  <a:srgbClr val="26231F"/>
+                </a:solidFill>
+              </a:rPr>
+              <a:t>INSURANCE CHECK</a:t>
+            </a:r>
+          </a:p>
+        </p:txBody>
+      </p:sp>
+      <p:sp>
+        <p:nvSpPr>
+          <p:cNvPr id="5" name="포인트"/>
+          <p:cNvSpPr/>
+          <p:nvPr/>
+        </p:nvSpPr>
+        <p:spPr>
+          <a:xfrm>
+            <a:off x="11204143" y="246888"/>
+            <a:ext cx="237744" cy="237744"/>
+          </a:xfrm>
+          <a:prstGeom prst="donut">
+            <a:avLst/>
+          </a:prstGeom>
+          <a:solidFill>
+            <a:srgbClr val="D8B879"/>
+          </a:solidFill>
+          <a:ln>
+            <a:noFill/>
           </a:ln>
         </p:spPr>
         <p:txBody>
@@ -7886,8 +8225,8 @@
         </p:nvSpPr>
         <p:spPr>
           <a:xfrm>
-            <a:off x="777240" y="548640"/>
-            <a:ext cx="9357055" cy="822960"/>
+            <a:off x="640080" y="731520"/>
+            <a:ext cx="10911535" cy="822960"/>
           </a:xfrm>
         </p:spPr>
         <p:txBody>
@@ -7904,7 +8243,7 @@
             <a:r>
               <a:rPr sz="3000" b="1" i="0">
                 <a:solidFill>
-                  <a:srgbClr val="715214"/>
+                  <a:srgbClr val="26231F"/>
                 </a:solidFill>
               </a:rPr>
               <a:t>월 보험료 한눈에</a:t>
@@ -7914,27 +8253,25 @@
       </p:sp>
       <p:sp>
         <p:nvSpPr>
-          <p:cNvPr id="4" name="카드 1"/>
+          <p:cNvPr id="6" name="카드 1"/>
           <p:cNvSpPr/>
           <p:nvPr/>
         </p:nvSpPr>
         <p:spPr>
           <a:xfrm>
-            <a:off x="777240" y="1554480"/>
-            <a:ext cx="3393338" cy="2926080"/>
+            <a:off x="640080" y="1783080"/>
+            <a:ext cx="3484778" cy="2926080"/>
           </a:xfrm>
           <a:prstGeom prst="roundRect">
             <a:avLst>
-              <a:gd name="adj" fmla="val 8000"/>
+              <a:gd name="adj" fmla="val 7000"/>
             </a:avLst>
           </a:prstGeom>
           <a:solidFill>
-            <a:srgbClr val="FCF7EE"/>
+            <a:srgbClr val="FBF6EC"/>
           </a:solidFill>
-          <a:ln w="15875">
-            <a:solidFill>
-              <a:srgbClr val="F7E8C9"/>
-            </a:solidFill>
+          <a:ln>
+            <a:noFill/>
           </a:ln>
         </p:spPr>
         <p:txBody>
@@ -7947,20 +8284,20 @@
       </p:sp>
       <p:sp>
         <p:nvSpPr>
-          <p:cNvPr id="5" name="번호 1"/>
+          <p:cNvPr id="7" name="번호 1"/>
           <p:cNvSpPr/>
           <p:nvPr/>
         </p:nvSpPr>
         <p:spPr>
           <a:xfrm>
-            <a:off x="960120" y="1737360"/>
+            <a:off x="822959" y="1965960"/>
             <a:ext cx="457200" cy="457200"/>
           </a:xfrm>
           <a:prstGeom prst="ellipse">
             <a:avLst/>
           </a:prstGeom>
           <a:solidFill>
-            <a:srgbClr val="C79123"/>
+            <a:srgbClr val="D8B879"/>
           </a:solidFill>
           <a:ln>
             <a:noFill/>
@@ -7980,7 +8317,7 @@
             <a:r>
               <a:rPr sz="1600" b="1" i="0">
                 <a:solidFill>
-                  <a:srgbClr val="FFFFFF"/>
+                  <a:srgbClr val="26231F"/>
                 </a:solidFill>
               </a:rPr>
               <a:t>1</a:t>
@@ -7990,14 +8327,14 @@
       </p:sp>
       <p:sp>
         <p:nvSpPr>
-          <p:cNvPr id="6" name="TextBox 5"/>
+          <p:cNvPr id="8" name="TextBox 7"/>
           <p:cNvSpPr txBox="1"/>
           <p:nvPr/>
         </p:nvSpPr>
         <p:spPr>
           <a:xfrm>
-            <a:off x="914400" y="2331720"/>
-            <a:ext cx="3119018" cy="640080"/>
+            <a:off x="777240" y="2560320"/>
+            <a:ext cx="3210458" cy="640080"/>
           </a:xfrm>
           <a:prstGeom prst="rect">
             <a:avLst/>
@@ -8018,7 +8355,7 @@
             <a:r>
               <a:rPr sz="1700" b="1" i="0">
                 <a:solidFill>
-                  <a:srgbClr val="715214"/>
+                  <a:srgbClr val="493E27"/>
                 </a:solidFill>
               </a:rPr>
               <a:t>월 보험료 합계</a:t>
@@ -8028,14 +8365,14 @@
       </p:sp>
       <p:sp>
         <p:nvSpPr>
-          <p:cNvPr id="7" name="TextBox 6"/>
+          <p:cNvPr id="9" name="TextBox 8"/>
           <p:cNvSpPr txBox="1"/>
           <p:nvPr/>
         </p:nvSpPr>
         <p:spPr>
           <a:xfrm>
-            <a:off x="914400" y="3017520"/>
-            <a:ext cx="3119018" cy="1325880"/>
+            <a:off x="777240" y="3246120"/>
+            <a:ext cx="3210458" cy="1325880"/>
           </a:xfrm>
           <a:prstGeom prst="rect">
             <a:avLst/>
@@ -8056,7 +8393,7 @@
             <a:r>
               <a:rPr sz="3000" b="0" i="0">
                 <a:solidFill>
-                  <a:srgbClr val="2B2B2B"/>
+                  <a:srgbClr val="26231F"/>
                 </a:solidFill>
               </a:rPr>
               <a:t>0원</a:t>
@@ -8066,27 +8403,25 @@
       </p:sp>
       <p:sp>
         <p:nvSpPr>
-          <p:cNvPr id="8" name="카드 2"/>
+          <p:cNvPr id="10" name="카드 2"/>
           <p:cNvSpPr/>
           <p:nvPr/>
         </p:nvSpPr>
         <p:spPr>
           <a:xfrm>
-            <a:off x="4399178" y="1554480"/>
-            <a:ext cx="3393338" cy="2926080"/>
+            <a:off x="4353458" y="1783080"/>
+            <a:ext cx="3484778" cy="2926080"/>
           </a:xfrm>
           <a:prstGeom prst="roundRect">
             <a:avLst>
-              <a:gd name="adj" fmla="val 8000"/>
+              <a:gd name="adj" fmla="val 7000"/>
             </a:avLst>
           </a:prstGeom>
           <a:solidFill>
-            <a:srgbClr val="FCF7EE"/>
+            <a:srgbClr val="FBF6EC"/>
           </a:solidFill>
-          <a:ln w="15875">
-            <a:solidFill>
-              <a:srgbClr val="F7E8C9"/>
-            </a:solidFill>
+          <a:ln>
+            <a:noFill/>
           </a:ln>
         </p:spPr>
         <p:txBody>
@@ -8099,20 +8434,20 @@
       </p:sp>
       <p:sp>
         <p:nvSpPr>
-          <p:cNvPr id="9" name="번호 2"/>
+          <p:cNvPr id="11" name="번호 2"/>
           <p:cNvSpPr/>
           <p:nvPr/>
         </p:nvSpPr>
         <p:spPr>
           <a:xfrm>
-            <a:off x="4582058" y="1737360"/>
+            <a:off x="4536338" y="1965960"/>
             <a:ext cx="457200" cy="457200"/>
           </a:xfrm>
           <a:prstGeom prst="ellipse">
             <a:avLst/>
           </a:prstGeom>
           <a:solidFill>
-            <a:srgbClr val="C79123"/>
+            <a:srgbClr val="D8B879"/>
           </a:solidFill>
           <a:ln>
             <a:noFill/>
@@ -8132,7 +8467,7 @@
             <a:r>
               <a:rPr sz="1600" b="1" i="0">
                 <a:solidFill>
-                  <a:srgbClr val="FFFFFF"/>
+                  <a:srgbClr val="26231F"/>
                 </a:solidFill>
               </a:rPr>
               <a:t>2</a:t>
@@ -8142,14 +8477,14 @@
       </p:sp>
       <p:sp>
         <p:nvSpPr>
-          <p:cNvPr id="10" name="TextBox 9"/>
+          <p:cNvPr id="12" name="TextBox 11"/>
           <p:cNvSpPr txBox="1"/>
           <p:nvPr/>
         </p:nvSpPr>
         <p:spPr>
           <a:xfrm>
-            <a:off x="4536338" y="2331720"/>
-            <a:ext cx="3119018" cy="640080"/>
+            <a:off x="4490618" y="2560320"/>
+            <a:ext cx="3210458" cy="640080"/>
           </a:xfrm>
           <a:prstGeom prst="rect">
             <a:avLst/>
@@ -8170,7 +8505,7 @@
             <a:r>
               <a:rPr sz="1700" b="1" i="0">
                 <a:solidFill>
-                  <a:srgbClr val="715214"/>
+                  <a:srgbClr val="493E27"/>
                 </a:solidFill>
               </a:rPr>
               <a:t>연 보험료 합계</a:t>
@@ -8180,14 +8515,14 @@
       </p:sp>
       <p:sp>
         <p:nvSpPr>
-          <p:cNvPr id="11" name="TextBox 10"/>
+          <p:cNvPr id="13" name="TextBox 12"/>
           <p:cNvSpPr txBox="1"/>
           <p:nvPr/>
         </p:nvSpPr>
         <p:spPr>
           <a:xfrm>
-            <a:off x="4536338" y="3017520"/>
-            <a:ext cx="3119018" cy="1325880"/>
+            <a:off x="4490618" y="3246120"/>
+            <a:ext cx="3210458" cy="1325880"/>
           </a:xfrm>
           <a:prstGeom prst="rect">
             <a:avLst/>
@@ -8208,7 +8543,7 @@
             <a:r>
               <a:rPr sz="3000" b="0" i="0">
                 <a:solidFill>
-                  <a:srgbClr val="2B2B2B"/>
+                  <a:srgbClr val="26231F"/>
                 </a:solidFill>
               </a:rPr>
               <a:t>0원</a:t>
@@ -8218,27 +8553,25 @@
       </p:sp>
       <p:sp>
         <p:nvSpPr>
-          <p:cNvPr id="12" name="카드 3"/>
+          <p:cNvPr id="14" name="카드 3"/>
           <p:cNvSpPr/>
           <p:nvPr/>
         </p:nvSpPr>
         <p:spPr>
           <a:xfrm>
-            <a:off x="8021116" y="1554480"/>
-            <a:ext cx="3393338" cy="2926080"/>
+            <a:off x="8066836" y="1783080"/>
+            <a:ext cx="3484778" cy="2926080"/>
           </a:xfrm>
           <a:prstGeom prst="roundRect">
             <a:avLst>
-              <a:gd name="adj" fmla="val 8000"/>
+              <a:gd name="adj" fmla="val 7000"/>
             </a:avLst>
           </a:prstGeom>
           <a:solidFill>
-            <a:srgbClr val="FCF7EE"/>
+            <a:srgbClr val="FBF6EC"/>
           </a:solidFill>
-          <a:ln w="15875">
-            <a:solidFill>
-              <a:srgbClr val="F7E8C9"/>
-            </a:solidFill>
+          <a:ln>
+            <a:noFill/>
           </a:ln>
         </p:spPr>
         <p:txBody>
@@ -8251,20 +8584,20 @@
       </p:sp>
       <p:sp>
         <p:nvSpPr>
-          <p:cNvPr id="13" name="번호 3"/>
+          <p:cNvPr id="15" name="번호 3"/>
           <p:cNvSpPr/>
           <p:nvPr/>
         </p:nvSpPr>
         <p:spPr>
           <a:xfrm>
-            <a:off x="8203996" y="1737360"/>
+            <a:off x="8249716" y="1965960"/>
             <a:ext cx="457200" cy="457200"/>
           </a:xfrm>
           <a:prstGeom prst="ellipse">
             <a:avLst/>
           </a:prstGeom>
           <a:solidFill>
-            <a:srgbClr val="C79123"/>
+            <a:srgbClr val="D8B879"/>
           </a:solidFill>
           <a:ln>
             <a:noFill/>
@@ -8284,7 +8617,7 @@
             <a:r>
               <a:rPr sz="1600" b="1" i="0">
                 <a:solidFill>
-                  <a:srgbClr val="FFFFFF"/>
+                  <a:srgbClr val="26231F"/>
                 </a:solidFill>
               </a:rPr>
               <a:t>3</a:t>
@@ -8294,14 +8627,14 @@
       </p:sp>
       <p:sp>
         <p:nvSpPr>
-          <p:cNvPr id="14" name="TextBox 13"/>
+          <p:cNvPr id="16" name="TextBox 15"/>
           <p:cNvSpPr txBox="1"/>
           <p:nvPr/>
         </p:nvSpPr>
         <p:spPr>
           <a:xfrm>
-            <a:off x="8158276" y="2331720"/>
-            <a:ext cx="3119018" cy="640080"/>
+            <a:off x="8203996" y="2560320"/>
+            <a:ext cx="3210458" cy="640080"/>
           </a:xfrm>
           <a:prstGeom prst="rect">
             <a:avLst/>
@@ -8322,7 +8655,7 @@
             <a:r>
               <a:rPr sz="1700" b="1" i="0">
                 <a:solidFill>
-                  <a:srgbClr val="715214"/>
+                  <a:srgbClr val="493E27"/>
                 </a:solidFill>
               </a:rPr>
               <a:t>월 소득 대비</a:t>
@@ -8332,14 +8665,14 @@
       </p:sp>
       <p:sp>
         <p:nvSpPr>
-          <p:cNvPr id="15" name="TextBox 14"/>
+          <p:cNvPr id="17" name="TextBox 16"/>
           <p:cNvSpPr txBox="1"/>
           <p:nvPr/>
         </p:nvSpPr>
         <p:spPr>
           <a:xfrm>
-            <a:off x="8158276" y="3017520"/>
-            <a:ext cx="3119018" cy="1325880"/>
+            <a:off x="8203996" y="3246120"/>
+            <a:ext cx="3210458" cy="1325880"/>
           </a:xfrm>
           <a:prstGeom prst="rect">
             <a:avLst/>
@@ -8360,7 +8693,7 @@
             <a:r>
               <a:rPr sz="3000" b="0" i="0">
                 <a:solidFill>
-                  <a:srgbClr val="2B2B2B"/>
+                  <a:srgbClr val="26231F"/>
                 </a:solidFill>
               </a:rPr>
               <a:t>0 %</a:t>
@@ -8370,14 +8703,14 @@
       </p:sp>
       <p:sp>
         <p:nvSpPr>
-          <p:cNvPr id="16" name="안내"/>
+          <p:cNvPr id="18" name="안내"/>
           <p:cNvSpPr txBox="1"/>
           <p:nvPr/>
         </p:nvSpPr>
         <p:spPr>
           <a:xfrm>
-            <a:off x="777240" y="4663440"/>
-            <a:ext cx="10637215" cy="365760"/>
+            <a:off x="640080" y="4892040"/>
+            <a:ext cx="10911535" cy="365760"/>
           </a:xfrm>
           <a:prstGeom prst="rect">
             <a:avLst/>
@@ -8420,7 +8753,7 @@
     <p:bg>
       <p:bgPr>
         <a:solidFill>
-          <a:srgbClr val="F7E8C9"/>
+          <a:srgbClr val="FFFFFF"/>
         </a:solidFill>
         <a:effectLst/>
       </p:bgPr>
@@ -8440,20 +8773,84 @@
         </p:nvSpPr>
         <p:spPr>
           <a:xfrm>
-            <a:off x="274320" y="274320"/>
-            <a:ext cx="11643055" cy="6309360"/>
+            <a:off x="640080" y="566928"/>
+            <a:ext cx="10911535" cy="10972"/>
           </a:xfrm>
           <a:prstGeom prst="rect">
             <a:avLst/>
           </a:prstGeom>
           <a:solidFill>
-            <a:srgbClr val="FFFFFF"/>
+            <a:srgbClr val="26231F"/>
           </a:solidFill>
-          <a:ln w="25400">
-            <a:solidFill>
-              <a:srgbClr val="C79123"/>
-            </a:solidFill>
-            <a:prstDash val="dash"/>
+          <a:ln>
+            <a:noFill/>
+          </a:ln>
+        </p:spPr>
+        <p:txBody>
+          <a:bodyPr rtlCol="0" anchor="ctr"/>
+          <a:lstStyle/>
+          <a:p>
+            <a:pPr algn="ctr"/>
+          </a:p>
+        </p:txBody>
+      </p:sp>
+      <p:sp>
+        <p:nvSpPr>
+          <p:cNvPr id="4" name="상단 라벨"/>
+          <p:cNvSpPr txBox="1"/>
+          <p:nvPr/>
+        </p:nvSpPr>
+        <p:spPr>
+          <a:xfrm>
+            <a:off x="640080" y="237744"/>
+            <a:ext cx="5486400" cy="274320"/>
+          </a:xfrm>
+          <a:prstGeom prst="rect">
+            <a:avLst/>
+          </a:prstGeom>
+          <a:noFill/>
+        </p:spPr>
+        <p:txBody>
+          <a:bodyPr wrap="square" lIns="54864" rIns="54864" tIns="27432" bIns="27432" anchor="ctr">
+            <a:noAutofit/>
+          </a:bodyPr>
+          <a:lstStyle/>
+          <a:p>
+            <a:pPr algn="l">
+              <a:lnSpc>
+                <a:spcPct val="115000"/>
+              </a:lnSpc>
+            </a:pPr>
+            <a:r>
+              <a:rPr sz="900" b="1" i="0" spc="250">
+                <a:solidFill>
+                  <a:srgbClr val="26231F"/>
+                </a:solidFill>
+              </a:rPr>
+              <a:t>INSURANCE CHECK</a:t>
+            </a:r>
+          </a:p>
+        </p:txBody>
+      </p:sp>
+      <p:sp>
+        <p:nvSpPr>
+          <p:cNvPr id="5" name="포인트"/>
+          <p:cNvSpPr/>
+          <p:nvPr/>
+        </p:nvSpPr>
+        <p:spPr>
+          <a:xfrm>
+            <a:off x="11204143" y="246888"/>
+            <a:ext cx="237744" cy="237744"/>
+          </a:xfrm>
+          <a:prstGeom prst="donut">
+            <a:avLst/>
+          </a:prstGeom>
+          <a:solidFill>
+            <a:srgbClr val="D8B879"/>
+          </a:solidFill>
+          <a:ln>
+            <a:noFill/>
           </a:ln>
         </p:spPr>
         <p:txBody>
@@ -8476,8 +8873,8 @@
         </p:nvSpPr>
         <p:spPr>
           <a:xfrm>
-            <a:off x="777240" y="548640"/>
-            <a:ext cx="9357055" cy="822960"/>
+            <a:off x="640080" y="731520"/>
+            <a:ext cx="10911535" cy="822960"/>
           </a:xfrm>
         </p:spPr>
         <p:txBody>
@@ -8494,7 +8891,7 @@
             <a:r>
               <a:rPr sz="3000" b="1" i="0">
                 <a:solidFill>
-                  <a:srgbClr val="715214"/>
+                  <a:srgbClr val="26231F"/>
                 </a:solidFill>
               </a:rPr>
               <a:t>점검 메모와 다음 할 일</a:t>
@@ -8504,27 +8901,25 @@
       </p:sp>
       <p:sp>
         <p:nvSpPr>
-          <p:cNvPr id="4" name="카드 1"/>
+          <p:cNvPr id="6" name="카드 1"/>
           <p:cNvSpPr/>
           <p:nvPr/>
         </p:nvSpPr>
         <p:spPr>
           <a:xfrm>
-            <a:off x="777240" y="1554480"/>
-            <a:ext cx="3393338" cy="4023359"/>
+            <a:off x="640080" y="1783080"/>
+            <a:ext cx="3484778" cy="3931920"/>
           </a:xfrm>
           <a:prstGeom prst="roundRect">
             <a:avLst>
-              <a:gd name="adj" fmla="val 8000"/>
+              <a:gd name="adj" fmla="val 7000"/>
             </a:avLst>
           </a:prstGeom>
           <a:solidFill>
-            <a:srgbClr val="FCF7EE"/>
+            <a:srgbClr val="FBF6EC"/>
           </a:solidFill>
-          <a:ln w="15875">
-            <a:solidFill>
-              <a:srgbClr val="F7E8C9"/>
-            </a:solidFill>
+          <a:ln>
+            <a:noFill/>
           </a:ln>
         </p:spPr>
         <p:txBody>
@@ -8537,20 +8932,20 @@
       </p:sp>
       <p:sp>
         <p:nvSpPr>
-          <p:cNvPr id="5" name="번호 1"/>
+          <p:cNvPr id="7" name="번호 1"/>
           <p:cNvSpPr/>
           <p:nvPr/>
         </p:nvSpPr>
         <p:spPr>
           <a:xfrm>
-            <a:off x="960120" y="1737360"/>
+            <a:off x="822959" y="1965960"/>
             <a:ext cx="457200" cy="457200"/>
           </a:xfrm>
           <a:prstGeom prst="ellipse">
             <a:avLst/>
           </a:prstGeom>
           <a:solidFill>
-            <a:srgbClr val="C79123"/>
+            <a:srgbClr val="D8B879"/>
           </a:solidFill>
           <a:ln>
             <a:noFill/>
@@ -8570,7 +8965,7 @@
             <a:r>
               <a:rPr sz="1600" b="1" i="0">
                 <a:solidFill>
-                  <a:srgbClr val="FFFFFF"/>
+                  <a:srgbClr val="26231F"/>
                 </a:solidFill>
               </a:rPr>
               <a:t>1</a:t>
@@ -8580,14 +8975,14 @@
       </p:sp>
       <p:sp>
         <p:nvSpPr>
-          <p:cNvPr id="6" name="TextBox 5"/>
+          <p:cNvPr id="8" name="TextBox 7"/>
           <p:cNvSpPr txBox="1"/>
           <p:nvPr/>
         </p:nvSpPr>
         <p:spPr>
           <a:xfrm>
-            <a:off x="914400" y="2331720"/>
-            <a:ext cx="3119018" cy="640080"/>
+            <a:off x="777240" y="2560320"/>
+            <a:ext cx="3210458" cy="640080"/>
           </a:xfrm>
           <a:prstGeom prst="rect">
             <a:avLst/>
@@ -8608,7 +9003,7 @@
             <a:r>
               <a:rPr sz="1800" b="1" i="0">
                 <a:solidFill>
-                  <a:srgbClr val="715214"/>
+                  <a:srgbClr val="493E27"/>
                 </a:solidFill>
               </a:rPr>
               <a:t>확인할 것</a:t>
@@ -8618,14 +9013,14 @@
       </p:sp>
       <p:sp>
         <p:nvSpPr>
-          <p:cNvPr id="7" name="TextBox 6"/>
+          <p:cNvPr id="9" name="TextBox 8"/>
           <p:cNvSpPr txBox="1"/>
           <p:nvPr/>
         </p:nvSpPr>
         <p:spPr>
           <a:xfrm>
-            <a:off x="914400" y="3017520"/>
-            <a:ext cx="3119018" cy="2423159"/>
+            <a:off x="777240" y="3246120"/>
+            <a:ext cx="3210458" cy="2331720"/>
           </a:xfrm>
           <a:prstGeom prst="rect">
             <a:avLst/>
@@ -8646,7 +9041,7 @@
             <a:r>
               <a:rPr sz="1500" b="0" i="0">
                 <a:solidFill>
-                  <a:srgbClr val="2B2B2B"/>
+                  <a:srgbClr val="26231F"/>
                 </a:solidFill>
               </a:rPr>
               <a:t>내용을 입력하세요</a:t>
@@ -8656,27 +9051,25 @@
       </p:sp>
       <p:sp>
         <p:nvSpPr>
-          <p:cNvPr id="8" name="카드 2"/>
+          <p:cNvPr id="10" name="카드 2"/>
           <p:cNvSpPr/>
           <p:nvPr/>
         </p:nvSpPr>
         <p:spPr>
           <a:xfrm>
-            <a:off x="4399178" y="1554480"/>
-            <a:ext cx="3393338" cy="4023359"/>
+            <a:off x="4353458" y="1783080"/>
+            <a:ext cx="3484778" cy="3931920"/>
           </a:xfrm>
           <a:prstGeom prst="roundRect">
             <a:avLst>
-              <a:gd name="adj" fmla="val 8000"/>
+              <a:gd name="adj" fmla="val 7000"/>
             </a:avLst>
           </a:prstGeom>
           <a:solidFill>
-            <a:srgbClr val="FCF7EE"/>
+            <a:srgbClr val="FBF6EC"/>
           </a:solidFill>
-          <a:ln w="15875">
-            <a:solidFill>
-              <a:srgbClr val="F7E8C9"/>
-            </a:solidFill>
+          <a:ln>
+            <a:noFill/>
           </a:ln>
         </p:spPr>
         <p:txBody>
@@ -8689,20 +9082,20 @@
       </p:sp>
       <p:sp>
         <p:nvSpPr>
-          <p:cNvPr id="9" name="번호 2"/>
+          <p:cNvPr id="11" name="번호 2"/>
           <p:cNvSpPr/>
           <p:nvPr/>
         </p:nvSpPr>
         <p:spPr>
           <a:xfrm>
-            <a:off x="4582058" y="1737360"/>
+            <a:off x="4536338" y="1965960"/>
             <a:ext cx="457200" cy="457200"/>
           </a:xfrm>
           <a:prstGeom prst="ellipse">
             <a:avLst/>
           </a:prstGeom>
           <a:solidFill>
-            <a:srgbClr val="C79123"/>
+            <a:srgbClr val="D8B879"/>
           </a:solidFill>
           <a:ln>
             <a:noFill/>
@@ -8722,7 +9115,7 @@
             <a:r>
               <a:rPr sz="1600" b="1" i="0">
                 <a:solidFill>
-                  <a:srgbClr val="FFFFFF"/>
+                  <a:srgbClr val="26231F"/>
                 </a:solidFill>
               </a:rPr>
               <a:t>2</a:t>
@@ -8732,14 +9125,14 @@
       </p:sp>
       <p:sp>
         <p:nvSpPr>
-          <p:cNvPr id="10" name="TextBox 9"/>
+          <p:cNvPr id="12" name="TextBox 11"/>
           <p:cNvSpPr txBox="1"/>
           <p:nvPr/>
         </p:nvSpPr>
         <p:spPr>
           <a:xfrm>
-            <a:off x="4536338" y="2331720"/>
-            <a:ext cx="3119018" cy="640080"/>
+            <a:off x="4490618" y="2560320"/>
+            <a:ext cx="3210458" cy="640080"/>
           </a:xfrm>
           <a:prstGeom prst="rect">
             <a:avLst/>
@@ -8760,7 +9153,7 @@
             <a:r>
               <a:rPr sz="1800" b="1" i="0">
                 <a:solidFill>
-                  <a:srgbClr val="715214"/>
+                  <a:srgbClr val="493E27"/>
                 </a:solidFill>
               </a:rPr>
               <a:t>문의할 것</a:t>
@@ -8770,14 +9163,14 @@
       </p:sp>
       <p:sp>
         <p:nvSpPr>
-          <p:cNvPr id="11" name="TextBox 10"/>
+          <p:cNvPr id="13" name="TextBox 12"/>
           <p:cNvSpPr txBox="1"/>
           <p:nvPr/>
         </p:nvSpPr>
         <p:spPr>
           <a:xfrm>
-            <a:off x="4536338" y="3017520"/>
-            <a:ext cx="3119018" cy="2423159"/>
+            <a:off x="4490618" y="3246120"/>
+            <a:ext cx="3210458" cy="2331720"/>
           </a:xfrm>
           <a:prstGeom prst="rect">
             <a:avLst/>
@@ -8798,7 +9191,7 @@
             <a:r>
               <a:rPr sz="1500" b="0" i="0">
                 <a:solidFill>
-                  <a:srgbClr val="2B2B2B"/>
+                  <a:srgbClr val="26231F"/>
                 </a:solidFill>
               </a:rPr>
               <a:t>내용을 입력하세요</a:t>
@@ -8808,27 +9201,25 @@
       </p:sp>
       <p:sp>
         <p:nvSpPr>
-          <p:cNvPr id="12" name="카드 3"/>
+          <p:cNvPr id="14" name="카드 3"/>
           <p:cNvSpPr/>
           <p:nvPr/>
         </p:nvSpPr>
         <p:spPr>
           <a:xfrm>
-            <a:off x="8021116" y="1554480"/>
-            <a:ext cx="3393338" cy="4023359"/>
+            <a:off x="8066836" y="1783080"/>
+            <a:ext cx="3484778" cy="3931920"/>
           </a:xfrm>
           <a:prstGeom prst="roundRect">
             <a:avLst>
-              <a:gd name="adj" fmla="val 8000"/>
+              <a:gd name="adj" fmla="val 7000"/>
             </a:avLst>
           </a:prstGeom>
           <a:solidFill>
-            <a:srgbClr val="FCF7EE"/>
+            <a:srgbClr val="FBF6EC"/>
           </a:solidFill>
-          <a:ln w="15875">
-            <a:solidFill>
-              <a:srgbClr val="F7E8C9"/>
-            </a:solidFill>
+          <a:ln>
+            <a:noFill/>
           </a:ln>
         </p:spPr>
         <p:txBody>
@@ -8841,20 +9232,20 @@
       </p:sp>
       <p:sp>
         <p:nvSpPr>
-          <p:cNvPr id="13" name="번호 3"/>
+          <p:cNvPr id="15" name="번호 3"/>
           <p:cNvSpPr/>
           <p:nvPr/>
         </p:nvSpPr>
         <p:spPr>
           <a:xfrm>
-            <a:off x="8203996" y="1737360"/>
+            <a:off x="8249716" y="1965960"/>
             <a:ext cx="457200" cy="457200"/>
           </a:xfrm>
           <a:prstGeom prst="ellipse">
             <a:avLst/>
           </a:prstGeom>
           <a:solidFill>
-            <a:srgbClr val="C79123"/>
+            <a:srgbClr val="D8B879"/>
           </a:solidFill>
           <a:ln>
             <a:noFill/>
@@ -8874,7 +9265,7 @@
             <a:r>
               <a:rPr sz="1600" b="1" i="0">
                 <a:solidFill>
-                  <a:srgbClr val="FFFFFF"/>
+                  <a:srgbClr val="26231F"/>
                 </a:solidFill>
               </a:rPr>
               <a:t>3</a:t>
@@ -8884,14 +9275,14 @@
       </p:sp>
       <p:sp>
         <p:nvSpPr>
-          <p:cNvPr id="14" name="TextBox 13"/>
+          <p:cNvPr id="16" name="TextBox 15"/>
           <p:cNvSpPr txBox="1"/>
           <p:nvPr/>
         </p:nvSpPr>
         <p:spPr>
           <a:xfrm>
-            <a:off x="8158276" y="2331720"/>
-            <a:ext cx="3119018" cy="640080"/>
+            <a:off x="8203996" y="2560320"/>
+            <a:ext cx="3210458" cy="640080"/>
           </a:xfrm>
           <a:prstGeom prst="rect">
             <a:avLst/>
@@ -8912,7 +9303,7 @@
             <a:r>
               <a:rPr sz="1800" b="1" i="0">
                 <a:solidFill>
-                  <a:srgbClr val="715214"/>
+                  <a:srgbClr val="493E27"/>
                 </a:solidFill>
               </a:rPr>
               <a:t>정리할 날짜</a:t>
@@ -8922,14 +9313,14 @@
       </p:sp>
       <p:sp>
         <p:nvSpPr>
-          <p:cNvPr id="15" name="TextBox 14"/>
+          <p:cNvPr id="17" name="TextBox 16"/>
           <p:cNvSpPr txBox="1"/>
           <p:nvPr/>
         </p:nvSpPr>
         <p:spPr>
           <a:xfrm>
-            <a:off x="8158276" y="3017520"/>
-            <a:ext cx="3119018" cy="2423159"/>
+            <a:off x="8203996" y="3246120"/>
+            <a:ext cx="3210458" cy="2331720"/>
           </a:xfrm>
           <a:prstGeom prst="rect">
             <a:avLst/>
@@ -8950,7 +9341,7 @@
             <a:r>
               <a:rPr sz="1500" b="0" i="0">
                 <a:solidFill>
-                  <a:srgbClr val="2B2B2B"/>
+                  <a:srgbClr val="26231F"/>
                 </a:solidFill>
               </a:rPr>
               <a:t>내용을 입력하세요</a:t>
@@ -8960,14 +9351,14 @@
       </p:sp>
       <p:sp>
         <p:nvSpPr>
-          <p:cNvPr id="16" name="안내 문구"/>
+          <p:cNvPr id="18" name="안내 문구"/>
           <p:cNvSpPr txBox="1"/>
           <p:nvPr/>
         </p:nvSpPr>
         <p:spPr>
           <a:xfrm>
-            <a:off x="777240" y="5669280"/>
-            <a:ext cx="10637215" cy="548640"/>
+            <a:off x="640080" y="5806440"/>
+            <a:ext cx="10911535" cy="548640"/>
           </a:xfrm>
           <a:prstGeom prst="rect">
             <a:avLst/>
@@ -9015,34 +9406,34 @@
         <a:sysClr val="window" lastClr="FFFFFF"/>
       </a:lt1>
       <a:dk2>
-        <a:srgbClr val="715214"/>
+        <a:srgbClr val="493E27"/>
       </a:dk2>
       <a:lt2>
-        <a:srgbClr val="FCF7EE"/>
+        <a:srgbClr val="FBF6EC"/>
       </a:lt2>
       <a:accent1>
-        <a:srgbClr val="C79123"/>
+        <a:srgbClr val="D8B879"/>
       </a:accent1>
       <a:accent2>
-        <a:srgbClr val="3B8391"/>
+        <a:srgbClr val="D7E198"/>
       </a:accent2>
       <a:accent3>
-        <a:srgbClr val="715214"/>
+        <a:srgbClr val="493E27"/>
       </a:accent3>
       <a:accent4>
-        <a:srgbClr val="F7E8C9"/>
+        <a:srgbClr val="F6EBD5"/>
       </a:accent4>
       <a:accent5>
-        <a:srgbClr val="818A5A"/>
+        <a:srgbClr val="D8CC88"/>
       </a:accent5>
       <a:accent6>
-        <a:srgbClr val="AA9772"/>
+        <a:srgbClr val="928B7D"/>
       </a:accent6>
       <a:hlink>
-        <a:srgbClr val="C79123"/>
+        <a:srgbClr val="D8B879"/>
       </a:hlink>
       <a:folHlink>
-        <a:srgbClr val="715214"/>
+        <a:srgbClr val="493E27"/>
       </a:folHlink>
     </a:clrScheme>
     <a:fontScheme name="Office">
